--- a/webinar_2026_04_08/GoFigr Webinar - April 8, 2026.pptx
+++ b/webinar_2026_04_08/GoFigr Webinar - April 8, 2026.pptx
@@ -9,10 +9,10 @@
   </p:notesMasterIdLst>
   <p:sldIdLst>
     <p:sldId id="256" r:id="rId2"/>
-    <p:sldId id="303" r:id="rId3"/>
-    <p:sldId id="304" r:id="rId4"/>
-    <p:sldId id="298" r:id="rId5"/>
-    <p:sldId id="311" r:id="rId6"/>
+    <p:sldId id="311" r:id="rId3"/>
+    <p:sldId id="303" r:id="rId4"/>
+    <p:sldId id="304" r:id="rId5"/>
+    <p:sldId id="298" r:id="rId6"/>
     <p:sldId id="310" r:id="rId7"/>
   </p:sldIdLst>
   <p:sldSz cx="12192000" cy="6858000"/>
@@ -4192,7 +4192,7 @@
           <p:cNvPr id="2" name="Title 1">
             <a:extLst>
               <a:ext uri="{FF2B5EF4-FFF2-40B4-BE49-F238E27FC236}">
-                <a16:creationId xmlns:a16="http://schemas.microsoft.com/office/drawing/2014/main" id="{97D14C25-831F-C5E7-5FEC-00F8B364947A}"/>
+                <a16:creationId xmlns:a16="http://schemas.microsoft.com/office/drawing/2014/main" id="{A096B34D-6B1C-7028-DDDA-E5FD3BCB8D62}"/>
               </a:ext>
             </a:extLst>
           </p:cNvPr>
@@ -4205,19 +4205,99 @@
         </p:nvSpPr>
         <p:spPr/>
         <p:txBody>
+          <a:bodyPr/>
+          <a:lstStyle/>
+          <a:p>
+            <a:r>
+              <a:rPr lang="en-US" dirty="0"/>
+              <a:t>Today</a:t>
+            </a:r>
+          </a:p>
+        </p:txBody>
+      </p:sp>
+      <p:sp>
+        <p:nvSpPr>
+          <p:cNvPr id="3" name="Content Placeholder 2">
+            <a:extLst>
+              <a:ext uri="{FF2B5EF4-FFF2-40B4-BE49-F238E27FC236}">
+                <a16:creationId xmlns:a16="http://schemas.microsoft.com/office/drawing/2014/main" id="{F9DFCED2-3E88-BD8C-9317-99FF7B5154EF}"/>
+              </a:ext>
+            </a:extLst>
+          </p:cNvPr>
+          <p:cNvSpPr>
+            <a:spLocks noGrp="1"/>
+          </p:cNvSpPr>
+          <p:nvPr>
+            <p:ph idx="1"/>
+          </p:nvPr>
+        </p:nvSpPr>
+        <p:spPr>
+          <a:xfrm>
+            <a:off x="549963" y="1258380"/>
+            <a:ext cx="5694973" cy="4914691"/>
+          </a:xfrm>
+        </p:spPr>
+        <p:txBody>
           <a:bodyPr>
-            <a:normAutofit fontScale="90000"/>
+            <a:normAutofit/>
           </a:bodyPr>
           <a:lstStyle/>
           <a:p>
             <a:r>
               <a:rPr lang="en-US" dirty="0"/>
-              <a:t>Tracking down context and reproducing figures is </a:t>
-            </a:r>
-            <a:r>
-              <a:rPr lang="en-US" u="sng" dirty="0"/>
-              <a:t>hard</a:t>
-            </a:r>
+              <a:t>GoFigr setup</a:t>
+            </a:r>
+          </a:p>
+          <a:p>
+            <a:r>
+              <a:rPr lang="en-US" dirty="0"/>
+              <a:t>TCGA download</a:t>
+            </a:r>
+          </a:p>
+          <a:p>
+            <a:r>
+              <a:rPr lang="en-US"/>
+              <a:t>LUAD </a:t>
+            </a:r>
+            <a:r>
+              <a:rPr lang="en-US" dirty="0"/>
+              <a:t>+ LUSC differential expression in R</a:t>
+            </a:r>
+          </a:p>
+          <a:p>
+            <a:r>
+              <a:rPr lang="en-US" dirty="0"/>
+              <a:t>Follow-up analysis in Python (Jupyter)</a:t>
+            </a:r>
+          </a:p>
+          <a:p>
+            <a:r>
+              <a:rPr lang="en-US" dirty="0"/>
+              <a:t>Clean Room!</a:t>
+            </a:r>
+          </a:p>
+          <a:p>
+            <a:r>
+              <a:rPr lang="en-US" dirty="0"/>
+              <a:t>Combine both into an AI-generated slide deck with full provenance</a:t>
+            </a:r>
+          </a:p>
+          <a:p>
+            <a:pPr lvl="1"/>
+            <a:r>
+              <a:rPr lang="en-US" dirty="0"/>
+              <a:t>… and update to latest figures with a click of a button! </a:t>
+            </a:r>
+          </a:p>
+          <a:p>
+            <a:pPr lvl="1"/>
+            <a:endParaRPr lang="en-US" dirty="0"/>
+          </a:p>
+          <a:p>
+            <a:pPr marL="0" indent="0">
+              <a:buNone/>
+            </a:pPr>
+            <a:endParaRPr lang="en-US" dirty="0"/>
           </a:p>
         </p:txBody>
       </p:sp>
@@ -4226,7 +4306,7 @@
           <p:cNvPr id="4" name="Slide Number Placeholder 3">
             <a:extLst>
               <a:ext uri="{FF2B5EF4-FFF2-40B4-BE49-F238E27FC236}">
-                <a16:creationId xmlns:a16="http://schemas.microsoft.com/office/drawing/2014/main" id="{2B7FF300-3EBF-D59A-8668-0147862312B7}"/>
+                <a16:creationId xmlns:a16="http://schemas.microsoft.com/office/drawing/2014/main" id="{3AC4762B-5992-3552-6578-A2EF4DF617F8}"/>
               </a:ext>
             </a:extLst>
           </p:cNvPr>
@@ -4251,59 +4331,12 @@
           </a:p>
         </p:txBody>
       </p:sp>
-      <p:pic>
-        <p:nvPicPr>
-          <p:cNvPr id="1028" name="Picture 4" descr="Plot object">
-            <a:extLst>
-              <a:ext uri="{FF2B5EF4-FFF2-40B4-BE49-F238E27FC236}">
-                <a16:creationId xmlns:a16="http://schemas.microsoft.com/office/drawing/2014/main" id="{1783A5FB-EE6F-BB76-DB6D-4B7260C88B7A}"/>
-              </a:ext>
-            </a:extLst>
-          </p:cNvPr>
-          <p:cNvPicPr>
-            <a:picLocks noChangeAspect="1" noChangeArrowheads="1"/>
-          </p:cNvPicPr>
-          <p:nvPr/>
-        </p:nvPicPr>
-        <p:blipFill>
-          <a:blip r:embed="rId2">
-            <a:extLst>
-              <a:ext uri="{28A0092B-C50C-407E-A947-70E740481C1C}">
-                <a14:useLocalDpi xmlns:a14="http://schemas.microsoft.com/office/drawing/2010/main" val="0"/>
-              </a:ext>
-            </a:extLst>
-          </a:blip>
-          <a:srcRect/>
-          <a:stretch>
-            <a:fillRect/>
-          </a:stretch>
-        </p:blipFill>
-        <p:spPr bwMode="auto">
-          <a:xfrm>
-            <a:off x="5832783" y="1507412"/>
-            <a:ext cx="5320191" cy="3340100"/>
-          </a:xfrm>
-          <a:prstGeom prst="rect">
-            <a:avLst/>
-          </a:prstGeom>
-          <a:ln>
-            <a:noFill/>
-          </a:ln>
-          <a:effectLst>
-            <a:outerShdw blurRad="292100" dist="139700" dir="2700000" algn="tl" rotWithShape="0">
-              <a:srgbClr val="333333">
-                <a:alpha val="65000"/>
-              </a:srgbClr>
-            </a:outerShdw>
-          </a:effectLst>
-        </p:spPr>
-      </p:pic>
-      <p:sp>
-        <p:nvSpPr>
-          <p:cNvPr id="6" name="Rounded Rectangle 5">
-            <a:extLst>
-              <a:ext uri="{FF2B5EF4-FFF2-40B4-BE49-F238E27FC236}">
-                <a16:creationId xmlns:a16="http://schemas.microsoft.com/office/drawing/2014/main" id="{77D105A7-11AA-D8BA-A041-B6789520C999}"/>
+      <p:sp>
+        <p:nvSpPr>
+          <p:cNvPr id="8" name="Rounded Rectangle 7">
+            <a:extLst>
+              <a:ext uri="{FF2B5EF4-FFF2-40B4-BE49-F238E27FC236}">
+                <a16:creationId xmlns:a16="http://schemas.microsoft.com/office/drawing/2014/main" id="{FFB1AAC3-BE4D-35D5-455A-A3ADF6486555}"/>
               </a:ext>
             </a:extLst>
           </p:cNvPr>
@@ -4312,22 +4345,25 @@
         </p:nvSpPr>
         <p:spPr>
           <a:xfrm>
-            <a:off x="673388" y="1645446"/>
-            <a:ext cx="4253567" cy="748573"/>
+            <a:off x="7292457" y="1258380"/>
+            <a:ext cx="4763255" cy="3792682"/>
           </a:xfrm>
           <a:prstGeom prst="roundRect">
-            <a:avLst/>
+            <a:avLst>
+              <a:gd name="adj" fmla="val 3242"/>
+            </a:avLst>
           </a:prstGeom>
+          <a:ln w="28575"/>
         </p:spPr>
         <p:style>
           <a:lnRef idx="2">
-            <a:schemeClr val="accent3"/>
+            <a:schemeClr val="accent4"/>
           </a:lnRef>
           <a:fillRef idx="1">
             <a:schemeClr val="lt1"/>
           </a:fillRef>
           <a:effectRef idx="0">
-            <a:schemeClr val="accent3"/>
+            <a:schemeClr val="accent4"/>
           </a:effectRef>
           <a:fontRef idx="minor">
             <a:schemeClr val="dk1"/>
@@ -4337,390 +4373,107 @@
           <a:bodyPr rtlCol="0" anchor="ctr"/>
           <a:lstStyle/>
           <a:p>
+            <a:pPr algn="ctr"/>
+            <a:endParaRPr lang="en-US" sz="2800" b="1" dirty="0"/>
+          </a:p>
+          <a:p>
+            <a:pPr algn="ctr"/>
+            <a:r>
+              <a:rPr lang="en-US" sz="2800" b="1" dirty="0"/>
+              <a:t>Free stuff</a:t>
+            </a:r>
+          </a:p>
+          <a:p>
+            <a:pPr algn="ctr"/>
+            <a:endParaRPr lang="en-US" sz="2800" b="1" dirty="0"/>
+          </a:p>
+          <a:p>
+            <a:pPr marL="342900" indent="-342900">
+              <a:buFont typeface="Arial" panose="020B0604020202020204" pitchFamily="34" charset="0"/>
+              <a:buChar char="•"/>
+            </a:pPr>
             <a:r>
               <a:rPr lang="en-US" sz="2000" dirty="0"/>
-              <a:t>Does this figure </a:t>
-            </a:r>
-            <a:r>
-              <a:rPr lang="en-US" sz="2000" u="sng" dirty="0"/>
-              <a:t>include</a:t>
-            </a:r>
+              <a:t>Code and slides from today: </a:t>
+            </a:r>
+            <a:r>
+              <a:rPr lang="en-US" sz="2000" dirty="0">
+                <a:hlinkClick r:id="rId2"/>
+              </a:rPr>
+              <a:t>https://github.com/GoFigr/examples</a:t>
+            </a:r>
+            <a:endParaRPr lang="en-US" sz="2000" dirty="0"/>
+          </a:p>
+          <a:p>
+            <a:pPr marL="342900" indent="-342900">
+              <a:buFont typeface="Arial" panose="020B0604020202020204" pitchFamily="34" charset="0"/>
+              <a:buChar char="•"/>
+            </a:pPr>
             <a:r>
               <a:rPr lang="en-US" sz="2000" dirty="0"/>
-              <a:t> smokers?</a:t>
-            </a:r>
-          </a:p>
-        </p:txBody>
-      </p:sp>
-      <p:sp>
-        <p:nvSpPr>
-          <p:cNvPr id="7" name="Rounded Rectangle 6">
-            <a:extLst>
-              <a:ext uri="{FF2B5EF4-FFF2-40B4-BE49-F238E27FC236}">
-                <a16:creationId xmlns:a16="http://schemas.microsoft.com/office/drawing/2014/main" id="{34095A05-B8EF-796F-08F7-006839DDDB2B}"/>
-              </a:ext>
-            </a:extLst>
-          </p:cNvPr>
-          <p:cNvSpPr/>
-          <p:nvPr/>
-        </p:nvSpPr>
-        <p:spPr>
-          <a:xfrm>
-            <a:off x="673388" y="2587140"/>
-            <a:ext cx="4253567" cy="748573"/>
-          </a:xfrm>
-          <a:prstGeom prst="roundRect">
-            <a:avLst/>
-          </a:prstGeom>
-        </p:spPr>
-        <p:style>
-          <a:lnRef idx="2">
-            <a:schemeClr val="accent3"/>
-          </a:lnRef>
-          <a:fillRef idx="1">
-            <a:schemeClr val="lt1"/>
-          </a:fillRef>
-          <a:effectRef idx="0">
-            <a:schemeClr val="accent3"/>
-          </a:effectRef>
-          <a:fontRef idx="minor">
-            <a:schemeClr val="dk1"/>
-          </a:fontRef>
-        </p:style>
-        <p:txBody>
-          <a:bodyPr rtlCol="0" anchor="ctr"/>
-          <a:lstStyle/>
-          <a:p>
+              <a:t>GoFigr signup at </a:t>
+            </a:r>
+            <a:r>
+              <a:rPr lang="en-US" sz="2000" dirty="0">
+                <a:hlinkClick r:id="rId3"/>
+              </a:rPr>
+              <a:t>https://app.gofigr.io/register</a:t>
+            </a:r>
             <a:r>
               <a:rPr lang="en-US" sz="2000" dirty="0"/>
-              <a:t>Which </a:t>
-            </a:r>
-            <a:r>
-              <a:rPr lang="en-US" sz="2000" u="sng" dirty="0"/>
-              <a:t>version</a:t>
-            </a:r>
+              <a:t> </a:t>
+            </a:r>
+          </a:p>
+          <a:p>
+            <a:pPr marL="800100" lvl="1" indent="-342900">
+              <a:buFont typeface="Arial" panose="020B0604020202020204" pitchFamily="34" charset="0"/>
+              <a:buChar char="•"/>
+            </a:pPr>
             <a:r>
               <a:rPr lang="en-US" sz="2000" dirty="0"/>
-              <a:t> of the data did we use?</a:t>
-            </a:r>
-          </a:p>
-        </p:txBody>
-      </p:sp>
-      <p:sp>
-        <p:nvSpPr>
-          <p:cNvPr id="8" name="Rounded Rectangle 7">
-            <a:extLst>
-              <a:ext uri="{FF2B5EF4-FFF2-40B4-BE49-F238E27FC236}">
-                <a16:creationId xmlns:a16="http://schemas.microsoft.com/office/drawing/2014/main" id="{47D45D03-02B6-C5BE-A974-2380856DDE13}"/>
-              </a:ext>
-            </a:extLst>
-          </p:cNvPr>
-          <p:cNvSpPr/>
-          <p:nvPr/>
-        </p:nvSpPr>
-        <p:spPr>
-          <a:xfrm>
-            <a:off x="673388" y="3528834"/>
-            <a:ext cx="4253567" cy="748573"/>
-          </a:xfrm>
-          <a:prstGeom prst="roundRect">
-            <a:avLst/>
-          </a:prstGeom>
-        </p:spPr>
-        <p:style>
-          <a:lnRef idx="2">
-            <a:schemeClr val="accent3"/>
-          </a:lnRef>
-          <a:fillRef idx="1">
-            <a:schemeClr val="lt1"/>
-          </a:fillRef>
-          <a:effectRef idx="0">
-            <a:schemeClr val="accent3"/>
-          </a:effectRef>
-          <a:fontRef idx="minor">
-            <a:schemeClr val="dk1"/>
-          </a:fontRef>
-        </p:style>
-        <p:txBody>
-          <a:bodyPr rtlCol="0" anchor="ctr"/>
-          <a:lstStyle/>
-          <a:p>
+              <a:t>Also send me a note at </a:t>
+            </a:r>
+            <a:r>
+              <a:rPr lang="en-US" sz="2000" dirty="0">
+                <a:hlinkClick r:id="rId4"/>
+              </a:rPr>
+              <a:t>maciej@gofigr.io</a:t>
+            </a:r>
             <a:r>
               <a:rPr lang="en-US" sz="2000" dirty="0"/>
-              <a:t>Can you re-do with our corporate colors? 🫠</a:t>
-            </a:r>
-          </a:p>
-        </p:txBody>
-      </p:sp>
-      <p:pic>
-        <p:nvPicPr>
-          <p:cNvPr id="1030" name="Picture 6" descr="Punctuation of Life: Question Mark | by Christal Luster | Medium">
-            <a:extLst>
-              <a:ext uri="{FF2B5EF4-FFF2-40B4-BE49-F238E27FC236}">
-                <a16:creationId xmlns:a16="http://schemas.microsoft.com/office/drawing/2014/main" id="{BBF90BF1-7DD0-EC08-8611-F623E314F024}"/>
-              </a:ext>
-            </a:extLst>
-          </p:cNvPr>
-          <p:cNvPicPr>
-            <a:picLocks noChangeAspect="1" noChangeArrowheads="1"/>
-          </p:cNvPicPr>
-          <p:nvPr/>
-        </p:nvPicPr>
-        <p:blipFill>
-          <a:blip r:embed="rId3">
-            <a:extLst>
-              <a:ext uri="{28A0092B-C50C-407E-A947-70E740481C1C}">
-                <a14:useLocalDpi xmlns:a14="http://schemas.microsoft.com/office/drawing/2010/main" val="0"/>
-              </a:ext>
-            </a:extLst>
-          </a:blip>
-          <a:srcRect/>
-          <a:stretch>
-            <a:fillRect/>
-          </a:stretch>
-        </p:blipFill>
-        <p:spPr bwMode="auto">
-          <a:xfrm>
-            <a:off x="99966" y="4555117"/>
-            <a:ext cx="1319135" cy="1314874"/>
-          </a:xfrm>
-          <a:prstGeom prst="rect">
-            <a:avLst/>
-          </a:prstGeom>
-          <a:noFill/>
-          <a:extLst>
-            <a:ext uri="{909E8E84-426E-40DD-AFC4-6F175D3DCCD1}">
-              <a14:hiddenFill xmlns:a14="http://schemas.microsoft.com/office/drawing/2010/main">
-                <a:solidFill>
-                  <a:srgbClr val="FFFFFF"/>
-                </a:solidFill>
-              </a14:hiddenFill>
-            </a:ext>
-          </a:extLst>
-        </p:spPr>
-      </p:pic>
-      <p:sp>
-        <p:nvSpPr>
-          <p:cNvPr id="14" name="Rounded Rectangle 13">
-            <a:extLst>
-              <a:ext uri="{FF2B5EF4-FFF2-40B4-BE49-F238E27FC236}">
-                <a16:creationId xmlns:a16="http://schemas.microsoft.com/office/drawing/2014/main" id="{08480127-4A6E-AA35-5B54-F1EA56C6063D}"/>
-              </a:ext>
-            </a:extLst>
-          </p:cNvPr>
-          <p:cNvSpPr/>
-          <p:nvPr/>
-        </p:nvSpPr>
-        <p:spPr>
-          <a:xfrm>
-            <a:off x="1920150" y="5340035"/>
-            <a:ext cx="8924307" cy="820122"/>
-          </a:xfrm>
-          <a:prstGeom prst="roundRect">
-            <a:avLst/>
-          </a:prstGeom>
-        </p:spPr>
-        <p:style>
-          <a:lnRef idx="2">
-            <a:schemeClr val="accent6">
-              <a:shade val="15000"/>
-            </a:schemeClr>
-          </a:lnRef>
-          <a:fillRef idx="1">
-            <a:schemeClr val="accent6"/>
-          </a:fillRef>
-          <a:effectRef idx="0">
-            <a:schemeClr val="accent6"/>
-          </a:effectRef>
-          <a:fontRef idx="minor">
-            <a:schemeClr val="lt1"/>
-          </a:fontRef>
-        </p:style>
-        <p:txBody>
-          <a:bodyPr rtlCol="0" anchor="ctr"/>
-          <a:lstStyle/>
+              <a:t> for an upgrade</a:t>
+            </a:r>
+          </a:p>
+          <a:p>
+            <a:pPr marL="342900" indent="-342900">
+              <a:buFont typeface="Arial" panose="020B0604020202020204" pitchFamily="34" charset="0"/>
+              <a:buChar char="•"/>
+            </a:pPr>
+            <a:r>
+              <a:rPr lang="en-US" sz="2000" dirty="0"/>
+              <a:t>Documentation at </a:t>
+            </a:r>
+            <a:r>
+              <a:rPr lang="en-US" sz="2000" dirty="0">
+                <a:hlinkClick r:id="rId5"/>
+              </a:rPr>
+              <a:t>https://docs.gofigr.io/</a:t>
+            </a:r>
+            <a:endParaRPr lang="en-US" sz="2000" dirty="0"/>
+          </a:p>
+          <a:p>
+            <a:endParaRPr lang="en-US" sz="2000" dirty="0"/>
+          </a:p>
           <a:p>
             <a:pPr algn="ctr"/>
-            <a:r>
-              <a:rPr lang="en-US" sz="2400" dirty="0"/>
-              <a:t>Most figures are shared informally over Teams/Slack/Email. How do you keep track?</a:t>
-            </a:r>
-          </a:p>
-        </p:txBody>
-      </p:sp>
-      <p:pic>
-        <p:nvPicPr>
-          <p:cNvPr id="15" name="Picture 10" descr="Microsoft PowerPoint - Wikipedia">
-            <a:extLst>
-              <a:ext uri="{FF2B5EF4-FFF2-40B4-BE49-F238E27FC236}">
-                <a16:creationId xmlns:a16="http://schemas.microsoft.com/office/drawing/2014/main" id="{0353782A-56B4-5916-E865-0FC5AA4FC02A}"/>
-              </a:ext>
-            </a:extLst>
-          </p:cNvPr>
-          <p:cNvPicPr>
-            <a:picLocks noChangeAspect="1" noChangeArrowheads="1"/>
-          </p:cNvPicPr>
-          <p:nvPr/>
-        </p:nvPicPr>
-        <p:blipFill>
-          <a:blip r:embed="rId4">
-            <a:extLst>
-              <a:ext uri="{28A0092B-C50C-407E-A947-70E740481C1C}">
-                <a14:useLocalDpi xmlns:a14="http://schemas.microsoft.com/office/drawing/2010/main" val="0"/>
-              </a:ext>
-            </a:extLst>
-          </a:blip>
-          <a:srcRect/>
-          <a:stretch>
-            <a:fillRect/>
-          </a:stretch>
-        </p:blipFill>
-        <p:spPr bwMode="auto">
-          <a:xfrm>
-            <a:off x="5371639" y="1354136"/>
-            <a:ext cx="564519" cy="525753"/>
-          </a:xfrm>
-          <a:prstGeom prst="rect">
-            <a:avLst/>
-          </a:prstGeom>
-          <a:noFill/>
-          <a:extLst>
-            <a:ext uri="{909E8E84-426E-40DD-AFC4-6F175D3DCCD1}">
-              <a14:hiddenFill xmlns:a14="http://schemas.microsoft.com/office/drawing/2010/main">
-                <a:solidFill>
-                  <a:srgbClr val="FFFFFF"/>
-                </a:solidFill>
-              </a14:hiddenFill>
-            </a:ext>
-          </a:extLst>
-        </p:spPr>
-      </p:pic>
-      <p:pic>
-        <p:nvPicPr>
-          <p:cNvPr id="16" name="Picture 18" descr="Microsoft Teams - South Piedmont Community College">
-            <a:extLst>
-              <a:ext uri="{FF2B5EF4-FFF2-40B4-BE49-F238E27FC236}">
-                <a16:creationId xmlns:a16="http://schemas.microsoft.com/office/drawing/2014/main" id="{6E9A0529-14B3-6D71-FED7-5B81377ECB70}"/>
-              </a:ext>
-            </a:extLst>
-          </p:cNvPr>
-          <p:cNvPicPr>
-            <a:picLocks noChangeAspect="1" noChangeArrowheads="1"/>
-          </p:cNvPicPr>
-          <p:nvPr/>
-        </p:nvPicPr>
-        <p:blipFill rotWithShape="1">
-          <a:blip r:embed="rId5">
-            <a:extLst>
-              <a:ext uri="{28A0092B-C50C-407E-A947-70E740481C1C}">
-                <a14:useLocalDpi xmlns:a14="http://schemas.microsoft.com/office/drawing/2010/main" val="0"/>
-              </a:ext>
-            </a:extLst>
-          </a:blip>
-          <a:srcRect l="27965" r="29296" b="35302"/>
-          <a:stretch/>
-        </p:blipFill>
-        <p:spPr bwMode="auto">
-          <a:xfrm>
-            <a:off x="10844457" y="1269742"/>
-            <a:ext cx="617034" cy="525752"/>
-          </a:xfrm>
-          <a:prstGeom prst="rect">
-            <a:avLst/>
-          </a:prstGeom>
-          <a:noFill/>
-          <a:extLst>
-            <a:ext uri="{909E8E84-426E-40DD-AFC4-6F175D3DCCD1}">
-              <a14:hiddenFill xmlns:a14="http://schemas.microsoft.com/office/drawing/2010/main">
-                <a:solidFill>
-                  <a:srgbClr val="FFFFFF"/>
-                </a:solidFill>
-              </a14:hiddenFill>
-            </a:ext>
-          </a:extLst>
-        </p:spPr>
-      </p:pic>
-      <p:pic>
-        <p:nvPicPr>
-          <p:cNvPr id="17" name="Picture 8">
-            <a:extLst>
-              <a:ext uri="{FF2B5EF4-FFF2-40B4-BE49-F238E27FC236}">
-                <a16:creationId xmlns:a16="http://schemas.microsoft.com/office/drawing/2014/main" id="{E39EA72F-E500-45FE-38FF-E40F86A91601}"/>
-              </a:ext>
-            </a:extLst>
-          </p:cNvPr>
-          <p:cNvPicPr>
-            <a:picLocks noChangeAspect="1" noChangeArrowheads="1"/>
-          </p:cNvPicPr>
-          <p:nvPr/>
-        </p:nvPicPr>
-        <p:blipFill>
-          <a:blip r:embed="rId6">
-            <a:extLst>
-              <a:ext uri="{28A0092B-C50C-407E-A947-70E740481C1C}">
-                <a14:useLocalDpi xmlns:a14="http://schemas.microsoft.com/office/drawing/2010/main" val="0"/>
-              </a:ext>
-            </a:extLst>
-          </a:blip>
-          <a:srcRect/>
-          <a:stretch>
-            <a:fillRect/>
-          </a:stretch>
-        </p:blipFill>
-        <p:spPr bwMode="auto">
-          <a:xfrm>
-            <a:off x="10584670" y="4636629"/>
-            <a:ext cx="1367133" cy="348726"/>
-          </a:xfrm>
-          <a:prstGeom prst="rect">
-            <a:avLst/>
-          </a:prstGeom>
-          <a:noFill/>
-          <a:extLst>
-            <a:ext uri="{909E8E84-426E-40DD-AFC4-6F175D3DCCD1}">
-              <a14:hiddenFill xmlns:a14="http://schemas.microsoft.com/office/drawing/2010/main">
-                <a:solidFill>
-                  <a:srgbClr val="FFFFFF"/>
-                </a:solidFill>
-              </a14:hiddenFill>
-            </a:ext>
-          </a:extLst>
-        </p:spPr>
-      </p:pic>
-      <p:pic>
-        <p:nvPicPr>
-          <p:cNvPr id="18" name="Picture 17">
-            <a:extLst>
-              <a:ext uri="{FF2B5EF4-FFF2-40B4-BE49-F238E27FC236}">
-                <a16:creationId xmlns:a16="http://schemas.microsoft.com/office/drawing/2014/main" id="{FD7D1FF0-6DE5-C72F-AB60-A43B718DE9E1}"/>
-              </a:ext>
-            </a:extLst>
-          </p:cNvPr>
-          <p:cNvPicPr>
-            <a:picLocks noChangeAspect="1"/>
-          </p:cNvPicPr>
-          <p:nvPr/>
-        </p:nvPicPr>
-        <p:blipFill>
-          <a:blip r:embed="rId7"/>
-          <a:stretch>
-            <a:fillRect/>
-          </a:stretch>
-        </p:blipFill>
-        <p:spPr>
-          <a:xfrm>
-            <a:off x="5359736" y="4548389"/>
-            <a:ext cx="576422" cy="536793"/>
-          </a:xfrm>
-          <a:prstGeom prst="rect">
-            <a:avLst/>
-          </a:prstGeom>
-        </p:spPr>
-      </p:pic>
+            <a:endParaRPr lang="en-US" dirty="0"/>
+          </a:p>
+        </p:txBody>
+      </p:sp>
     </p:spTree>
     <p:extLst>
       <p:ext uri="{BB962C8B-B14F-4D97-AF65-F5344CB8AC3E}">
-        <p14:creationId xmlns:p14="http://schemas.microsoft.com/office/powerpoint/2010/main" val="643248271"/>
+        <p14:creationId xmlns:p14="http://schemas.microsoft.com/office/powerpoint/2010/main" val="121403533"/>
       </p:ext>
     </p:extLst>
   </p:cSld>
@@ -4747,6 +4500,566 @@
           <a:chExt cx="0" cy="0"/>
         </a:xfrm>
       </p:grpSpPr>
+      <p:sp>
+        <p:nvSpPr>
+          <p:cNvPr id="2" name="Title 1">
+            <a:extLst>
+              <a:ext uri="{FF2B5EF4-FFF2-40B4-BE49-F238E27FC236}">
+                <a16:creationId xmlns:a16="http://schemas.microsoft.com/office/drawing/2014/main" id="{97D14C25-831F-C5E7-5FEC-00F8B364947A}"/>
+              </a:ext>
+            </a:extLst>
+          </p:cNvPr>
+          <p:cNvSpPr>
+            <a:spLocks noGrp="1"/>
+          </p:cNvSpPr>
+          <p:nvPr>
+            <p:ph type="title"/>
+          </p:nvPr>
+        </p:nvSpPr>
+        <p:spPr/>
+        <p:txBody>
+          <a:bodyPr>
+            <a:normAutofit fontScale="90000"/>
+          </a:bodyPr>
+          <a:lstStyle/>
+          <a:p>
+            <a:r>
+              <a:rPr lang="en-US" dirty="0"/>
+              <a:t>Tracking down context and reproducing figures is </a:t>
+            </a:r>
+            <a:r>
+              <a:rPr lang="en-US" u="sng" dirty="0"/>
+              <a:t>hard</a:t>
+            </a:r>
+          </a:p>
+        </p:txBody>
+      </p:sp>
+      <p:sp>
+        <p:nvSpPr>
+          <p:cNvPr id="4" name="Slide Number Placeholder 3">
+            <a:extLst>
+              <a:ext uri="{FF2B5EF4-FFF2-40B4-BE49-F238E27FC236}">
+                <a16:creationId xmlns:a16="http://schemas.microsoft.com/office/drawing/2014/main" id="{2B7FF300-3EBF-D59A-8668-0147862312B7}"/>
+              </a:ext>
+            </a:extLst>
+          </p:cNvPr>
+          <p:cNvSpPr>
+            <a:spLocks noGrp="1"/>
+          </p:cNvSpPr>
+          <p:nvPr>
+            <p:ph type="sldNum" sz="quarter" idx="12"/>
+          </p:nvPr>
+        </p:nvSpPr>
+        <p:spPr/>
+        <p:txBody>
+          <a:bodyPr/>
+          <a:lstStyle/>
+          <a:p>
+            <a:fld id="{7FCC63C6-BC1E-CC49-9701-9DA8C2A99AE0}" type="slidenum">
+              <a:rPr lang="en-US" smtClean="0"/>
+              <a:pPr/>
+              <a:t>3</a:t>
+            </a:fld>
+            <a:endParaRPr lang="en-US" dirty="0"/>
+          </a:p>
+        </p:txBody>
+      </p:sp>
+      <p:pic>
+        <p:nvPicPr>
+          <p:cNvPr id="1028" name="Picture 4" descr="Plot object">
+            <a:extLst>
+              <a:ext uri="{FF2B5EF4-FFF2-40B4-BE49-F238E27FC236}">
+                <a16:creationId xmlns:a16="http://schemas.microsoft.com/office/drawing/2014/main" id="{1783A5FB-EE6F-BB76-DB6D-4B7260C88B7A}"/>
+              </a:ext>
+            </a:extLst>
+          </p:cNvPr>
+          <p:cNvPicPr>
+            <a:picLocks noChangeAspect="1" noChangeArrowheads="1"/>
+          </p:cNvPicPr>
+          <p:nvPr/>
+        </p:nvPicPr>
+        <p:blipFill>
+          <a:blip r:embed="rId2">
+            <a:extLst>
+              <a:ext uri="{28A0092B-C50C-407E-A947-70E740481C1C}">
+                <a14:useLocalDpi xmlns:a14="http://schemas.microsoft.com/office/drawing/2010/main" val="0"/>
+              </a:ext>
+            </a:extLst>
+          </a:blip>
+          <a:srcRect/>
+          <a:stretch>
+            <a:fillRect/>
+          </a:stretch>
+        </p:blipFill>
+        <p:spPr bwMode="auto">
+          <a:xfrm>
+            <a:off x="5832783" y="1507412"/>
+            <a:ext cx="5320191" cy="3340100"/>
+          </a:xfrm>
+          <a:prstGeom prst="rect">
+            <a:avLst/>
+          </a:prstGeom>
+          <a:ln>
+            <a:noFill/>
+          </a:ln>
+          <a:effectLst>
+            <a:outerShdw blurRad="292100" dist="139700" dir="2700000" algn="tl" rotWithShape="0">
+              <a:srgbClr val="333333">
+                <a:alpha val="65000"/>
+              </a:srgbClr>
+            </a:outerShdw>
+          </a:effectLst>
+        </p:spPr>
+      </p:pic>
+      <p:sp>
+        <p:nvSpPr>
+          <p:cNvPr id="6" name="Rounded Rectangle 5">
+            <a:extLst>
+              <a:ext uri="{FF2B5EF4-FFF2-40B4-BE49-F238E27FC236}">
+                <a16:creationId xmlns:a16="http://schemas.microsoft.com/office/drawing/2014/main" id="{77D105A7-11AA-D8BA-A041-B6789520C999}"/>
+              </a:ext>
+            </a:extLst>
+          </p:cNvPr>
+          <p:cNvSpPr/>
+          <p:nvPr/>
+        </p:nvSpPr>
+        <p:spPr>
+          <a:xfrm>
+            <a:off x="673388" y="1645446"/>
+            <a:ext cx="4253567" cy="748573"/>
+          </a:xfrm>
+          <a:prstGeom prst="roundRect">
+            <a:avLst/>
+          </a:prstGeom>
+        </p:spPr>
+        <p:style>
+          <a:lnRef idx="2">
+            <a:schemeClr val="accent3"/>
+          </a:lnRef>
+          <a:fillRef idx="1">
+            <a:schemeClr val="lt1"/>
+          </a:fillRef>
+          <a:effectRef idx="0">
+            <a:schemeClr val="accent3"/>
+          </a:effectRef>
+          <a:fontRef idx="minor">
+            <a:schemeClr val="dk1"/>
+          </a:fontRef>
+        </p:style>
+        <p:txBody>
+          <a:bodyPr rtlCol="0" anchor="ctr"/>
+          <a:lstStyle/>
+          <a:p>
+            <a:r>
+              <a:rPr lang="en-US" sz="2000" dirty="0"/>
+              <a:t>Does this figure </a:t>
+            </a:r>
+            <a:r>
+              <a:rPr lang="en-US" sz="2000" u="sng" dirty="0"/>
+              <a:t>include</a:t>
+            </a:r>
+            <a:r>
+              <a:rPr lang="en-US" sz="2000" dirty="0"/>
+              <a:t> smokers?</a:t>
+            </a:r>
+          </a:p>
+        </p:txBody>
+      </p:sp>
+      <p:sp>
+        <p:nvSpPr>
+          <p:cNvPr id="7" name="Rounded Rectangle 6">
+            <a:extLst>
+              <a:ext uri="{FF2B5EF4-FFF2-40B4-BE49-F238E27FC236}">
+                <a16:creationId xmlns:a16="http://schemas.microsoft.com/office/drawing/2014/main" id="{34095A05-B8EF-796F-08F7-006839DDDB2B}"/>
+              </a:ext>
+            </a:extLst>
+          </p:cNvPr>
+          <p:cNvSpPr/>
+          <p:nvPr/>
+        </p:nvSpPr>
+        <p:spPr>
+          <a:xfrm>
+            <a:off x="673388" y="2587140"/>
+            <a:ext cx="4253567" cy="748573"/>
+          </a:xfrm>
+          <a:prstGeom prst="roundRect">
+            <a:avLst/>
+          </a:prstGeom>
+        </p:spPr>
+        <p:style>
+          <a:lnRef idx="2">
+            <a:schemeClr val="accent3"/>
+          </a:lnRef>
+          <a:fillRef idx="1">
+            <a:schemeClr val="lt1"/>
+          </a:fillRef>
+          <a:effectRef idx="0">
+            <a:schemeClr val="accent3"/>
+          </a:effectRef>
+          <a:fontRef idx="minor">
+            <a:schemeClr val="dk1"/>
+          </a:fontRef>
+        </p:style>
+        <p:txBody>
+          <a:bodyPr rtlCol="0" anchor="ctr"/>
+          <a:lstStyle/>
+          <a:p>
+            <a:r>
+              <a:rPr lang="en-US" sz="2000" dirty="0"/>
+              <a:t>Which </a:t>
+            </a:r>
+            <a:r>
+              <a:rPr lang="en-US" sz="2000" u="sng" dirty="0"/>
+              <a:t>version</a:t>
+            </a:r>
+            <a:r>
+              <a:rPr lang="en-US" sz="2000" dirty="0"/>
+              <a:t> of the data did we use?</a:t>
+            </a:r>
+          </a:p>
+        </p:txBody>
+      </p:sp>
+      <p:sp>
+        <p:nvSpPr>
+          <p:cNvPr id="8" name="Rounded Rectangle 7">
+            <a:extLst>
+              <a:ext uri="{FF2B5EF4-FFF2-40B4-BE49-F238E27FC236}">
+                <a16:creationId xmlns:a16="http://schemas.microsoft.com/office/drawing/2014/main" id="{47D45D03-02B6-C5BE-A974-2380856DDE13}"/>
+              </a:ext>
+            </a:extLst>
+          </p:cNvPr>
+          <p:cNvSpPr/>
+          <p:nvPr/>
+        </p:nvSpPr>
+        <p:spPr>
+          <a:xfrm>
+            <a:off x="673388" y="3528834"/>
+            <a:ext cx="4253567" cy="748573"/>
+          </a:xfrm>
+          <a:prstGeom prst="roundRect">
+            <a:avLst/>
+          </a:prstGeom>
+        </p:spPr>
+        <p:style>
+          <a:lnRef idx="2">
+            <a:schemeClr val="accent3"/>
+          </a:lnRef>
+          <a:fillRef idx="1">
+            <a:schemeClr val="lt1"/>
+          </a:fillRef>
+          <a:effectRef idx="0">
+            <a:schemeClr val="accent3"/>
+          </a:effectRef>
+          <a:fontRef idx="minor">
+            <a:schemeClr val="dk1"/>
+          </a:fontRef>
+        </p:style>
+        <p:txBody>
+          <a:bodyPr rtlCol="0" anchor="ctr"/>
+          <a:lstStyle/>
+          <a:p>
+            <a:r>
+              <a:rPr lang="en-US" sz="2000" dirty="0"/>
+              <a:t>Can you re-do with our corporate colors? 🫠</a:t>
+            </a:r>
+          </a:p>
+        </p:txBody>
+      </p:sp>
+      <p:pic>
+        <p:nvPicPr>
+          <p:cNvPr id="1030" name="Picture 6" descr="Punctuation of Life: Question Mark | by Christal Luster | Medium">
+            <a:extLst>
+              <a:ext uri="{FF2B5EF4-FFF2-40B4-BE49-F238E27FC236}">
+                <a16:creationId xmlns:a16="http://schemas.microsoft.com/office/drawing/2014/main" id="{BBF90BF1-7DD0-EC08-8611-F623E314F024}"/>
+              </a:ext>
+            </a:extLst>
+          </p:cNvPr>
+          <p:cNvPicPr>
+            <a:picLocks noChangeAspect="1" noChangeArrowheads="1"/>
+          </p:cNvPicPr>
+          <p:nvPr/>
+        </p:nvPicPr>
+        <p:blipFill>
+          <a:blip r:embed="rId3">
+            <a:extLst>
+              <a:ext uri="{28A0092B-C50C-407E-A947-70E740481C1C}">
+                <a14:useLocalDpi xmlns:a14="http://schemas.microsoft.com/office/drawing/2010/main" val="0"/>
+              </a:ext>
+            </a:extLst>
+          </a:blip>
+          <a:srcRect/>
+          <a:stretch>
+            <a:fillRect/>
+          </a:stretch>
+        </p:blipFill>
+        <p:spPr bwMode="auto">
+          <a:xfrm>
+            <a:off x="99966" y="4555117"/>
+            <a:ext cx="1319135" cy="1314874"/>
+          </a:xfrm>
+          <a:prstGeom prst="rect">
+            <a:avLst/>
+          </a:prstGeom>
+          <a:noFill/>
+          <a:extLst>
+            <a:ext uri="{909E8E84-426E-40DD-AFC4-6F175D3DCCD1}">
+              <a14:hiddenFill xmlns:a14="http://schemas.microsoft.com/office/drawing/2010/main">
+                <a:solidFill>
+                  <a:srgbClr val="FFFFFF"/>
+                </a:solidFill>
+              </a14:hiddenFill>
+            </a:ext>
+          </a:extLst>
+        </p:spPr>
+      </p:pic>
+      <p:sp>
+        <p:nvSpPr>
+          <p:cNvPr id="14" name="Rounded Rectangle 13">
+            <a:extLst>
+              <a:ext uri="{FF2B5EF4-FFF2-40B4-BE49-F238E27FC236}">
+                <a16:creationId xmlns:a16="http://schemas.microsoft.com/office/drawing/2014/main" id="{08480127-4A6E-AA35-5B54-F1EA56C6063D}"/>
+              </a:ext>
+            </a:extLst>
+          </p:cNvPr>
+          <p:cNvSpPr/>
+          <p:nvPr/>
+        </p:nvSpPr>
+        <p:spPr>
+          <a:xfrm>
+            <a:off x="1920150" y="5340035"/>
+            <a:ext cx="8924307" cy="820122"/>
+          </a:xfrm>
+          <a:prstGeom prst="roundRect">
+            <a:avLst/>
+          </a:prstGeom>
+        </p:spPr>
+        <p:style>
+          <a:lnRef idx="2">
+            <a:schemeClr val="accent6">
+              <a:shade val="15000"/>
+            </a:schemeClr>
+          </a:lnRef>
+          <a:fillRef idx="1">
+            <a:schemeClr val="accent6"/>
+          </a:fillRef>
+          <a:effectRef idx="0">
+            <a:schemeClr val="accent6"/>
+          </a:effectRef>
+          <a:fontRef idx="minor">
+            <a:schemeClr val="lt1"/>
+          </a:fontRef>
+        </p:style>
+        <p:txBody>
+          <a:bodyPr rtlCol="0" anchor="ctr"/>
+          <a:lstStyle/>
+          <a:p>
+            <a:pPr algn="ctr"/>
+            <a:r>
+              <a:rPr lang="en-US" sz="2400" dirty="0"/>
+              <a:t>Most figures are shared informally over Teams/Slack/Email. How do you keep track?</a:t>
+            </a:r>
+          </a:p>
+        </p:txBody>
+      </p:sp>
+      <p:pic>
+        <p:nvPicPr>
+          <p:cNvPr id="15" name="Picture 10" descr="Microsoft PowerPoint - Wikipedia">
+            <a:extLst>
+              <a:ext uri="{FF2B5EF4-FFF2-40B4-BE49-F238E27FC236}">
+                <a16:creationId xmlns:a16="http://schemas.microsoft.com/office/drawing/2014/main" id="{0353782A-56B4-5916-E865-0FC5AA4FC02A}"/>
+              </a:ext>
+            </a:extLst>
+          </p:cNvPr>
+          <p:cNvPicPr>
+            <a:picLocks noChangeAspect="1" noChangeArrowheads="1"/>
+          </p:cNvPicPr>
+          <p:nvPr/>
+        </p:nvPicPr>
+        <p:blipFill>
+          <a:blip r:embed="rId4">
+            <a:extLst>
+              <a:ext uri="{28A0092B-C50C-407E-A947-70E740481C1C}">
+                <a14:useLocalDpi xmlns:a14="http://schemas.microsoft.com/office/drawing/2010/main" val="0"/>
+              </a:ext>
+            </a:extLst>
+          </a:blip>
+          <a:srcRect/>
+          <a:stretch>
+            <a:fillRect/>
+          </a:stretch>
+        </p:blipFill>
+        <p:spPr bwMode="auto">
+          <a:xfrm>
+            <a:off x="5371639" y="1354136"/>
+            <a:ext cx="564519" cy="525753"/>
+          </a:xfrm>
+          <a:prstGeom prst="rect">
+            <a:avLst/>
+          </a:prstGeom>
+          <a:noFill/>
+          <a:extLst>
+            <a:ext uri="{909E8E84-426E-40DD-AFC4-6F175D3DCCD1}">
+              <a14:hiddenFill xmlns:a14="http://schemas.microsoft.com/office/drawing/2010/main">
+                <a:solidFill>
+                  <a:srgbClr val="FFFFFF"/>
+                </a:solidFill>
+              </a14:hiddenFill>
+            </a:ext>
+          </a:extLst>
+        </p:spPr>
+      </p:pic>
+      <p:pic>
+        <p:nvPicPr>
+          <p:cNvPr id="16" name="Picture 18" descr="Microsoft Teams - South Piedmont Community College">
+            <a:extLst>
+              <a:ext uri="{FF2B5EF4-FFF2-40B4-BE49-F238E27FC236}">
+                <a16:creationId xmlns:a16="http://schemas.microsoft.com/office/drawing/2014/main" id="{6E9A0529-14B3-6D71-FED7-5B81377ECB70}"/>
+              </a:ext>
+            </a:extLst>
+          </p:cNvPr>
+          <p:cNvPicPr>
+            <a:picLocks noChangeAspect="1" noChangeArrowheads="1"/>
+          </p:cNvPicPr>
+          <p:nvPr/>
+        </p:nvPicPr>
+        <p:blipFill rotWithShape="1">
+          <a:blip r:embed="rId5">
+            <a:extLst>
+              <a:ext uri="{28A0092B-C50C-407E-A947-70E740481C1C}">
+                <a14:useLocalDpi xmlns:a14="http://schemas.microsoft.com/office/drawing/2010/main" val="0"/>
+              </a:ext>
+            </a:extLst>
+          </a:blip>
+          <a:srcRect l="27965" r="29296" b="35302"/>
+          <a:stretch/>
+        </p:blipFill>
+        <p:spPr bwMode="auto">
+          <a:xfrm>
+            <a:off x="10844457" y="1269742"/>
+            <a:ext cx="617034" cy="525752"/>
+          </a:xfrm>
+          <a:prstGeom prst="rect">
+            <a:avLst/>
+          </a:prstGeom>
+          <a:noFill/>
+          <a:extLst>
+            <a:ext uri="{909E8E84-426E-40DD-AFC4-6F175D3DCCD1}">
+              <a14:hiddenFill xmlns:a14="http://schemas.microsoft.com/office/drawing/2010/main">
+                <a:solidFill>
+                  <a:srgbClr val="FFFFFF"/>
+                </a:solidFill>
+              </a14:hiddenFill>
+            </a:ext>
+          </a:extLst>
+        </p:spPr>
+      </p:pic>
+      <p:pic>
+        <p:nvPicPr>
+          <p:cNvPr id="17" name="Picture 8">
+            <a:extLst>
+              <a:ext uri="{FF2B5EF4-FFF2-40B4-BE49-F238E27FC236}">
+                <a16:creationId xmlns:a16="http://schemas.microsoft.com/office/drawing/2014/main" id="{E39EA72F-E500-45FE-38FF-E40F86A91601}"/>
+              </a:ext>
+            </a:extLst>
+          </p:cNvPr>
+          <p:cNvPicPr>
+            <a:picLocks noChangeAspect="1" noChangeArrowheads="1"/>
+          </p:cNvPicPr>
+          <p:nvPr/>
+        </p:nvPicPr>
+        <p:blipFill>
+          <a:blip r:embed="rId6">
+            <a:extLst>
+              <a:ext uri="{28A0092B-C50C-407E-A947-70E740481C1C}">
+                <a14:useLocalDpi xmlns:a14="http://schemas.microsoft.com/office/drawing/2010/main" val="0"/>
+              </a:ext>
+            </a:extLst>
+          </a:blip>
+          <a:srcRect/>
+          <a:stretch>
+            <a:fillRect/>
+          </a:stretch>
+        </p:blipFill>
+        <p:spPr bwMode="auto">
+          <a:xfrm>
+            <a:off x="10584670" y="4636629"/>
+            <a:ext cx="1367133" cy="348726"/>
+          </a:xfrm>
+          <a:prstGeom prst="rect">
+            <a:avLst/>
+          </a:prstGeom>
+          <a:noFill/>
+          <a:extLst>
+            <a:ext uri="{909E8E84-426E-40DD-AFC4-6F175D3DCCD1}">
+              <a14:hiddenFill xmlns:a14="http://schemas.microsoft.com/office/drawing/2010/main">
+                <a:solidFill>
+                  <a:srgbClr val="FFFFFF"/>
+                </a:solidFill>
+              </a14:hiddenFill>
+            </a:ext>
+          </a:extLst>
+        </p:spPr>
+      </p:pic>
+      <p:pic>
+        <p:nvPicPr>
+          <p:cNvPr id="18" name="Picture 17">
+            <a:extLst>
+              <a:ext uri="{FF2B5EF4-FFF2-40B4-BE49-F238E27FC236}">
+                <a16:creationId xmlns:a16="http://schemas.microsoft.com/office/drawing/2014/main" id="{FD7D1FF0-6DE5-C72F-AB60-A43B718DE9E1}"/>
+              </a:ext>
+            </a:extLst>
+          </p:cNvPr>
+          <p:cNvPicPr>
+            <a:picLocks noChangeAspect="1"/>
+          </p:cNvPicPr>
+          <p:nvPr/>
+        </p:nvPicPr>
+        <p:blipFill>
+          <a:blip r:embed="rId7"/>
+          <a:stretch>
+            <a:fillRect/>
+          </a:stretch>
+        </p:blipFill>
+        <p:spPr>
+          <a:xfrm>
+            <a:off x="5359736" y="4548389"/>
+            <a:ext cx="576422" cy="536793"/>
+          </a:xfrm>
+          <a:prstGeom prst="rect">
+            <a:avLst/>
+          </a:prstGeom>
+        </p:spPr>
+      </p:pic>
+    </p:spTree>
+    <p:extLst>
+      <p:ext uri="{BB962C8B-B14F-4D97-AF65-F5344CB8AC3E}">
+        <p14:creationId xmlns:p14="http://schemas.microsoft.com/office/powerpoint/2010/main" val="643248271"/>
+      </p:ext>
+    </p:extLst>
+  </p:cSld>
+  <p:clrMapOvr>
+    <a:masterClrMapping/>
+  </p:clrMapOvr>
+</p:sld>
+</file>
+
+<file path=ppt/slides/slide4.xml><?xml version="1.0" encoding="utf-8"?>
+<p:sld xmlns:a="http://schemas.openxmlformats.org/drawingml/2006/main" xmlns:r="http://schemas.openxmlformats.org/officeDocument/2006/relationships" xmlns:p="http://schemas.openxmlformats.org/presentationml/2006/main">
+  <p:cSld>
+    <p:spTree>
+      <p:nvGrpSpPr>
+        <p:cNvPr id="1" name=""/>
+        <p:cNvGrpSpPr/>
+        <p:nvPr/>
+      </p:nvGrpSpPr>
+      <p:grpSpPr>
+        <a:xfrm>
+          <a:off x="0" y="0"/>
+          <a:ext cx="0" cy="0"/>
+          <a:chOff x="0" y="0"/>
+          <a:chExt cx="0" cy="0"/>
+        </a:xfrm>
+      </p:grpSpPr>
       <p:pic>
         <p:nvPicPr>
           <p:cNvPr id="17" name="Picture 16">
@@ -4836,7 +5149,7 @@
             <a:fld id="{7FCC63C6-BC1E-CC49-9701-9DA8C2A99AE0}" type="slidenum">
               <a:rPr lang="en-US" smtClean="0"/>
               <a:pPr/>
-              <a:t>3</a:t>
+              <a:t>4</a:t>
             </a:fld>
             <a:endParaRPr lang="en-US" dirty="0"/>
           </a:p>
@@ -5303,7 +5616,7 @@
 </p:sld>
 </file>
 
-<file path=ppt/slides/slide4.xml><?xml version="1.0" encoding="utf-8"?>
+<file path=ppt/slides/slide5.xml><?xml version="1.0" encoding="utf-8"?>
 <p:sld xmlns:a="http://schemas.openxmlformats.org/drawingml/2006/main" xmlns:r="http://schemas.openxmlformats.org/officeDocument/2006/relationships" xmlns:p="http://schemas.openxmlformats.org/presentationml/2006/main">
   <p:cSld>
     <p:spTree>
@@ -5381,7 +5694,7 @@
             <a:fld id="{7FCC63C6-BC1E-CC49-9701-9DA8C2A99AE0}" type="slidenum">
               <a:rPr lang="en-US" smtClean="0"/>
               <a:pPr/>
-              <a:t>4</a:t>
+              <a:t>5</a:t>
             </a:fld>
             <a:endParaRPr lang="en-US" dirty="0"/>
           </a:p>
@@ -6185,190 +6498,6 @@
     <p:extLst>
       <p:ext uri="{BB962C8B-B14F-4D97-AF65-F5344CB8AC3E}">
         <p14:creationId xmlns:p14="http://schemas.microsoft.com/office/powerpoint/2010/main" val="831944503"/>
-      </p:ext>
-    </p:extLst>
-  </p:cSld>
-  <p:clrMapOvr>
-    <a:masterClrMapping/>
-  </p:clrMapOvr>
-</p:sld>
-</file>
-
-<file path=ppt/slides/slide5.xml><?xml version="1.0" encoding="utf-8"?>
-<p:sld xmlns:a="http://schemas.openxmlformats.org/drawingml/2006/main" xmlns:r="http://schemas.openxmlformats.org/officeDocument/2006/relationships" xmlns:p="http://schemas.openxmlformats.org/presentationml/2006/main">
-  <p:cSld>
-    <p:spTree>
-      <p:nvGrpSpPr>
-        <p:cNvPr id="1" name=""/>
-        <p:cNvGrpSpPr/>
-        <p:nvPr/>
-      </p:nvGrpSpPr>
-      <p:grpSpPr>
-        <a:xfrm>
-          <a:off x="0" y="0"/>
-          <a:ext cx="0" cy="0"/>
-          <a:chOff x="0" y="0"/>
-          <a:chExt cx="0" cy="0"/>
-        </a:xfrm>
-      </p:grpSpPr>
-      <p:sp>
-        <p:nvSpPr>
-          <p:cNvPr id="2" name="Title 1">
-            <a:extLst>
-              <a:ext uri="{FF2B5EF4-FFF2-40B4-BE49-F238E27FC236}">
-                <a16:creationId xmlns:a16="http://schemas.microsoft.com/office/drawing/2014/main" id="{A096B34D-6B1C-7028-DDDA-E5FD3BCB8D62}"/>
-              </a:ext>
-            </a:extLst>
-          </p:cNvPr>
-          <p:cNvSpPr>
-            <a:spLocks noGrp="1"/>
-          </p:cNvSpPr>
-          <p:nvPr>
-            <p:ph type="title"/>
-          </p:nvPr>
-        </p:nvSpPr>
-        <p:spPr/>
-        <p:txBody>
-          <a:bodyPr/>
-          <a:lstStyle/>
-          <a:p>
-            <a:r>
-              <a:rPr lang="en-US" dirty="0"/>
-              <a:t>Today</a:t>
-            </a:r>
-          </a:p>
-        </p:txBody>
-      </p:sp>
-      <p:sp>
-        <p:nvSpPr>
-          <p:cNvPr id="3" name="Content Placeholder 2">
-            <a:extLst>
-              <a:ext uri="{FF2B5EF4-FFF2-40B4-BE49-F238E27FC236}">
-                <a16:creationId xmlns:a16="http://schemas.microsoft.com/office/drawing/2014/main" id="{F9DFCED2-3E88-BD8C-9317-99FF7B5154EF}"/>
-              </a:ext>
-            </a:extLst>
-          </p:cNvPr>
-          <p:cNvSpPr>
-            <a:spLocks noGrp="1"/>
-          </p:cNvSpPr>
-          <p:nvPr>
-            <p:ph idx="1"/>
-          </p:nvPr>
-        </p:nvSpPr>
-        <p:spPr/>
-        <p:txBody>
-          <a:bodyPr/>
-          <a:lstStyle/>
-          <a:p>
-            <a:r>
-              <a:rPr lang="en-US" dirty="0"/>
-              <a:t>GoFigr setup</a:t>
-            </a:r>
-          </a:p>
-          <a:p>
-            <a:r>
-              <a:rPr lang="en-US" dirty="0"/>
-              <a:t>TCGA download</a:t>
-            </a:r>
-          </a:p>
-          <a:p>
-            <a:r>
-              <a:rPr lang="en-US" dirty="0"/>
-              <a:t>TCGA + LUSC differential expression in R</a:t>
-            </a:r>
-          </a:p>
-          <a:p>
-            <a:r>
-              <a:rPr lang="en-US" dirty="0" err="1"/>
-              <a:t>Followup</a:t>
-            </a:r>
-            <a:r>
-              <a:rPr lang="en-US" dirty="0"/>
-              <a:t> analysis in Python (Jupyter)</a:t>
-            </a:r>
-          </a:p>
-          <a:p>
-            <a:r>
-              <a:rPr lang="en-US" dirty="0"/>
-              <a:t>Clean Room!</a:t>
-            </a:r>
-          </a:p>
-          <a:p>
-            <a:r>
-              <a:rPr lang="en-US" dirty="0"/>
-              <a:t>Combine both into an AI-generated slide deck with full provenance</a:t>
-            </a:r>
-          </a:p>
-          <a:p>
-            <a:pPr lvl="1"/>
-            <a:r>
-              <a:rPr lang="en-US" dirty="0"/>
-              <a:t>… and update to latest figures with a click of a button! </a:t>
-            </a:r>
-          </a:p>
-          <a:p>
-            <a:pPr lvl="1"/>
-            <a:endParaRPr lang="en-US" dirty="0"/>
-          </a:p>
-          <a:p>
-            <a:pPr lvl="1"/>
-            <a:endParaRPr lang="en-US" dirty="0"/>
-          </a:p>
-          <a:p>
-            <a:r>
-              <a:rPr lang="en-US" dirty="0"/>
-              <a:t>Follow along with </a:t>
-            </a:r>
-            <a:r>
-              <a:rPr lang="en-US" dirty="0">
-                <a:hlinkClick r:id="rId2"/>
-              </a:rPr>
-              <a:t>https://github.com/GoFigr/examples</a:t>
-            </a:r>
-            <a:endParaRPr lang="en-US" dirty="0"/>
-          </a:p>
-          <a:p>
-            <a:pPr marL="0" indent="0">
-              <a:buNone/>
-            </a:pPr>
-            <a:endParaRPr lang="en-US" dirty="0"/>
-          </a:p>
-        </p:txBody>
-      </p:sp>
-      <p:sp>
-        <p:nvSpPr>
-          <p:cNvPr id="4" name="Slide Number Placeholder 3">
-            <a:extLst>
-              <a:ext uri="{FF2B5EF4-FFF2-40B4-BE49-F238E27FC236}">
-                <a16:creationId xmlns:a16="http://schemas.microsoft.com/office/drawing/2014/main" id="{3AC4762B-5992-3552-6578-A2EF4DF617F8}"/>
-              </a:ext>
-            </a:extLst>
-          </p:cNvPr>
-          <p:cNvSpPr>
-            <a:spLocks noGrp="1"/>
-          </p:cNvSpPr>
-          <p:nvPr>
-            <p:ph type="sldNum" sz="quarter" idx="12"/>
-          </p:nvPr>
-        </p:nvSpPr>
-        <p:spPr/>
-        <p:txBody>
-          <a:bodyPr/>
-          <a:lstStyle/>
-          <a:p>
-            <a:fld id="{7FCC63C6-BC1E-CC49-9701-9DA8C2A99AE0}" type="slidenum">
-              <a:rPr lang="en-US" smtClean="0"/>
-              <a:pPr/>
-              <a:t>5</a:t>
-            </a:fld>
-            <a:endParaRPr lang="en-US" dirty="0"/>
-          </a:p>
-        </p:txBody>
-      </p:sp>
-    </p:spTree>
-    <p:extLst>
-      <p:ext uri="{BB962C8B-B14F-4D97-AF65-F5344CB8AC3E}">
-        <p14:creationId xmlns:p14="http://schemas.microsoft.com/office/powerpoint/2010/main" val="121403533"/>
       </p:ext>
     </p:extLst>
   </p:cSld>

--- a/webinar_2026_04_08/GoFigr Webinar - April 8, 2026.pptx
+++ b/webinar_2026_04_08/GoFigr Webinar - April 8, 2026.pptx
@@ -9,11 +9,11 @@
   </p:notesMasterIdLst>
   <p:sldIdLst>
     <p:sldId id="256" r:id="rId2"/>
-    <p:sldId id="311" r:id="rId3"/>
-    <p:sldId id="303" r:id="rId4"/>
-    <p:sldId id="304" r:id="rId5"/>
-    <p:sldId id="298" r:id="rId6"/>
-    <p:sldId id="310" r:id="rId7"/>
+    <p:sldId id="312" r:id="rId3"/>
+    <p:sldId id="311" r:id="rId4"/>
+    <p:sldId id="310" r:id="rId5"/>
+    <p:sldId id="313" r:id="rId6"/>
+    <p:sldId id="298" r:id="rId7"/>
   </p:sldIdLst>
   <p:sldSz cx="12192000" cy="6858000"/>
   <p:notesSz cx="6858000" cy="9144000"/>
@@ -467,6 +467,90 @@
     </a:lvl9pPr>
   </p:notesStyle>
 </p:notesMaster>
+</file>
+
+<file path=ppt/notesSlides/notesSlide1.xml><?xml version="1.0" encoding="utf-8"?>
+<p:notes xmlns:a="http://schemas.openxmlformats.org/drawingml/2006/main" xmlns:r="http://schemas.openxmlformats.org/officeDocument/2006/relationships" xmlns:p="http://schemas.openxmlformats.org/presentationml/2006/main">
+  <p:cSld>
+    <p:spTree>
+      <p:nvGrpSpPr>
+        <p:cNvPr id="1" name=""/>
+        <p:cNvGrpSpPr/>
+        <p:nvPr/>
+      </p:nvGrpSpPr>
+      <p:grpSpPr>
+        <a:xfrm>
+          <a:off x="0" y="0"/>
+          <a:ext cx="0" cy="0"/>
+          <a:chOff x="0" y="0"/>
+          <a:chExt cx="0" cy="0"/>
+        </a:xfrm>
+      </p:grpSpPr>
+      <p:sp>
+        <p:nvSpPr>
+          <p:cNvPr id="2" name="Slide Image Placeholder 1"/>
+          <p:cNvSpPr>
+            <a:spLocks noGrp="1" noRot="1" noChangeAspect="1"/>
+          </p:cNvSpPr>
+          <p:nvPr>
+            <p:ph type="sldImg"/>
+          </p:nvPr>
+        </p:nvSpPr>
+        <p:spPr/>
+      </p:sp>
+      <p:sp>
+        <p:nvSpPr>
+          <p:cNvPr id="3" name="Notes Placeholder 2"/>
+          <p:cNvSpPr>
+            <a:spLocks noGrp="1"/>
+          </p:cNvSpPr>
+          <p:nvPr>
+            <p:ph type="body" idx="1"/>
+          </p:nvPr>
+        </p:nvSpPr>
+        <p:spPr/>
+        <p:txBody>
+          <a:bodyPr/>
+          <a:lstStyle/>
+          <a:p>
+            <a:endParaRPr lang="en-US" dirty="0"/>
+          </a:p>
+        </p:txBody>
+      </p:sp>
+      <p:sp>
+        <p:nvSpPr>
+          <p:cNvPr id="4" name="Slide Number Placeholder 3"/>
+          <p:cNvSpPr>
+            <a:spLocks noGrp="1"/>
+          </p:cNvSpPr>
+          <p:nvPr>
+            <p:ph type="sldNum" sz="quarter" idx="5"/>
+          </p:nvPr>
+        </p:nvSpPr>
+        <p:spPr/>
+        <p:txBody>
+          <a:bodyPr/>
+          <a:lstStyle/>
+          <a:p>
+            <a:fld id="{AA71B93A-DD76-5842-9D9F-2C38AC0339A7}" type="slidenum">
+              <a:rPr lang="en-US" smtClean="0"/>
+              <a:t>3</a:t>
+            </a:fld>
+            <a:endParaRPr lang="en-US"/>
+          </a:p>
+        </p:txBody>
+      </p:sp>
+    </p:spTree>
+    <p:extLst>
+      <p:ext uri="{BB962C8B-B14F-4D97-AF65-F5344CB8AC3E}">
+        <p14:creationId xmlns:p14="http://schemas.microsoft.com/office/powerpoint/2010/main" val="2350661810"/>
+      </p:ext>
+    </p:extLst>
+  </p:cSld>
+  <p:clrMapOvr>
+    <a:masterClrMapping/>
+  </p:clrMapOvr>
+</p:notes>
 </file>
 
 <file path=ppt/slideLayouts/slideLayout1.xml><?xml version="1.0" encoding="utf-8"?>
@@ -4192,7 +4276,7 @@
           <p:cNvPr id="2" name="Title 1">
             <a:extLst>
               <a:ext uri="{FF2B5EF4-FFF2-40B4-BE49-F238E27FC236}">
-                <a16:creationId xmlns:a16="http://schemas.microsoft.com/office/drawing/2014/main" id="{A096B34D-6B1C-7028-DDDA-E5FD3BCB8D62}"/>
+                <a16:creationId xmlns:a16="http://schemas.microsoft.com/office/drawing/2014/main" id="{6EB50228-499B-E31D-7198-218637543739}"/>
               </a:ext>
             </a:extLst>
           </p:cNvPr>
@@ -4210,94 +4294,8 @@
           <a:p>
             <a:r>
               <a:rPr lang="en-US" dirty="0"/>
-              <a:t>Today</a:t>
-            </a:r>
-          </a:p>
-        </p:txBody>
-      </p:sp>
-      <p:sp>
-        <p:nvSpPr>
-          <p:cNvPr id="3" name="Content Placeholder 2">
-            <a:extLst>
-              <a:ext uri="{FF2B5EF4-FFF2-40B4-BE49-F238E27FC236}">
-                <a16:creationId xmlns:a16="http://schemas.microsoft.com/office/drawing/2014/main" id="{F9DFCED2-3E88-BD8C-9317-99FF7B5154EF}"/>
-              </a:ext>
-            </a:extLst>
-          </p:cNvPr>
-          <p:cNvSpPr>
-            <a:spLocks noGrp="1"/>
-          </p:cNvSpPr>
-          <p:nvPr>
-            <p:ph idx="1"/>
-          </p:nvPr>
-        </p:nvSpPr>
-        <p:spPr>
-          <a:xfrm>
-            <a:off x="549963" y="1258380"/>
-            <a:ext cx="5694973" cy="4914691"/>
-          </a:xfrm>
-        </p:spPr>
-        <p:txBody>
-          <a:bodyPr>
-            <a:normAutofit/>
-          </a:bodyPr>
-          <a:lstStyle/>
-          <a:p>
-            <a:r>
-              <a:rPr lang="en-US" dirty="0"/>
-              <a:t>GoFigr setup</a:t>
-            </a:r>
-          </a:p>
-          <a:p>
-            <a:r>
-              <a:rPr lang="en-US" dirty="0"/>
-              <a:t>TCGA download</a:t>
-            </a:r>
-          </a:p>
-          <a:p>
-            <a:r>
-              <a:rPr lang="en-US"/>
-              <a:t>LUAD </a:t>
-            </a:r>
-            <a:r>
-              <a:rPr lang="en-US" dirty="0"/>
-              <a:t>+ LUSC differential expression in R</a:t>
-            </a:r>
-          </a:p>
-          <a:p>
-            <a:r>
-              <a:rPr lang="en-US" dirty="0"/>
-              <a:t>Follow-up analysis in Python (Jupyter)</a:t>
-            </a:r>
-          </a:p>
-          <a:p>
-            <a:r>
-              <a:rPr lang="en-US" dirty="0"/>
-              <a:t>Clean Room!</a:t>
-            </a:r>
-          </a:p>
-          <a:p>
-            <a:r>
-              <a:rPr lang="en-US" dirty="0"/>
-              <a:t>Combine both into an AI-generated slide deck with full provenance</a:t>
-            </a:r>
-          </a:p>
-          <a:p>
-            <a:pPr lvl="1"/>
-            <a:r>
-              <a:rPr lang="en-US" dirty="0"/>
-              <a:t>… and update to latest figures with a click of a button! </a:t>
-            </a:r>
-          </a:p>
-          <a:p>
-            <a:pPr lvl="1"/>
-            <a:endParaRPr lang="en-US" dirty="0"/>
-          </a:p>
-          <a:p>
-            <a:pPr marL="0" indent="0">
-              <a:buNone/>
-            </a:pPr>
-            <a:endParaRPr lang="en-US" dirty="0"/>
+              <a:t>What is this volcano plot showing, exactly?</a:t>
+            </a:r>
           </a:p>
         </p:txBody>
       </p:sp>
@@ -4306,7 +4304,7 @@
           <p:cNvPr id="4" name="Slide Number Placeholder 3">
             <a:extLst>
               <a:ext uri="{FF2B5EF4-FFF2-40B4-BE49-F238E27FC236}">
-                <a16:creationId xmlns:a16="http://schemas.microsoft.com/office/drawing/2014/main" id="{3AC4762B-5992-3552-6578-A2EF4DF617F8}"/>
+                <a16:creationId xmlns:a16="http://schemas.microsoft.com/office/drawing/2014/main" id="{8656E241-DF75-484C-8224-30F7DB6B40FD}"/>
               </a:ext>
             </a:extLst>
           </p:cNvPr>
@@ -4331,12 +4329,59 @@
           </a:p>
         </p:txBody>
       </p:sp>
-      <p:sp>
-        <p:nvSpPr>
-          <p:cNvPr id="8" name="Rounded Rectangle 7">
-            <a:extLst>
-              <a:ext uri="{FF2B5EF4-FFF2-40B4-BE49-F238E27FC236}">
-                <a16:creationId xmlns:a16="http://schemas.microsoft.com/office/drawing/2014/main" id="{FFB1AAC3-BE4D-35D5-455A-A3ADF6486555}"/>
+      <p:pic>
+        <p:nvPicPr>
+          <p:cNvPr id="1026" name="Picture 2" descr="Figure image">
+            <a:extLst>
+              <a:ext uri="{FF2B5EF4-FFF2-40B4-BE49-F238E27FC236}">
+                <a16:creationId xmlns:a16="http://schemas.microsoft.com/office/drawing/2014/main" id="{DF5FF784-3C11-C412-99D1-A5348D93A685}"/>
+              </a:ext>
+            </a:extLst>
+          </p:cNvPr>
+          <p:cNvPicPr>
+            <a:picLocks noChangeAspect="1" noChangeArrowheads="1"/>
+          </p:cNvPicPr>
+          <p:nvPr/>
+        </p:nvPicPr>
+        <p:blipFill>
+          <a:blip r:embed="rId2">
+            <a:extLst>
+              <a:ext uri="{28A0092B-C50C-407E-A947-70E740481C1C}">
+                <a14:useLocalDpi xmlns:a14="http://schemas.microsoft.com/office/drawing/2010/main" val="0"/>
+              </a:ext>
+            </a:extLst>
+          </a:blip>
+          <a:srcRect/>
+          <a:stretch>
+            <a:fillRect/>
+          </a:stretch>
+        </p:blipFill>
+        <p:spPr bwMode="auto">
+          <a:xfrm>
+            <a:off x="383889" y="1153727"/>
+            <a:ext cx="6909848" cy="4834879"/>
+          </a:xfrm>
+          <a:prstGeom prst="rect">
+            <a:avLst/>
+          </a:prstGeom>
+          <a:noFill/>
+          <a:extLst>
+            <a:ext uri="{909E8E84-426E-40DD-AFC4-6F175D3DCCD1}">
+              <a14:hiddenFill xmlns:a14="http://schemas.microsoft.com/office/drawing/2010/main">
+                <a:solidFill>
+                  <a:srgbClr val="FFFFFF"/>
+                </a:solidFill>
+              </a14:hiddenFill>
+            </a:ext>
+          </a:extLst>
+        </p:spPr>
+      </p:pic>
+      <p:sp>
+        <p:nvSpPr>
+          <p:cNvPr id="5" name="Rounded Rectangle 4">
+            <a:extLst>
+              <a:ext uri="{FF2B5EF4-FFF2-40B4-BE49-F238E27FC236}">
+                <a16:creationId xmlns:a16="http://schemas.microsoft.com/office/drawing/2014/main" id="{C1479A0A-B007-45C0-59A9-5A50E691C4B3}"/>
               </a:ext>
             </a:extLst>
           </p:cNvPr>
@@ -4345,25 +4390,22 @@
         </p:nvSpPr>
         <p:spPr>
           <a:xfrm>
-            <a:off x="7292457" y="1258380"/>
-            <a:ext cx="4763255" cy="3792682"/>
+            <a:off x="7554544" y="1687779"/>
+            <a:ext cx="4253567" cy="748573"/>
           </a:xfrm>
           <a:prstGeom prst="roundRect">
-            <a:avLst>
-              <a:gd name="adj" fmla="val 3242"/>
-            </a:avLst>
+            <a:avLst/>
           </a:prstGeom>
-          <a:ln w="28575"/>
         </p:spPr>
         <p:style>
           <a:lnRef idx="2">
-            <a:schemeClr val="accent4"/>
+            <a:schemeClr val="accent3"/>
           </a:lnRef>
           <a:fillRef idx="1">
             <a:schemeClr val="lt1"/>
           </a:fillRef>
           <a:effectRef idx="0">
-            <a:schemeClr val="accent4"/>
+            <a:schemeClr val="accent3"/>
           </a:effectRef>
           <a:fontRef idx="minor">
             <a:schemeClr val="dk1"/>
@@ -4373,107 +4415,125 @@
           <a:bodyPr rtlCol="0" anchor="ctr"/>
           <a:lstStyle/>
           <a:p>
-            <a:pPr algn="ctr"/>
-            <a:endParaRPr lang="en-US" sz="2800" b="1" dirty="0"/>
-          </a:p>
-          <a:p>
-            <a:pPr algn="ctr"/>
-            <a:r>
-              <a:rPr lang="en-US" sz="2800" b="1" dirty="0"/>
-              <a:t>Free stuff</a:t>
-            </a:r>
-          </a:p>
-          <a:p>
-            <a:pPr algn="ctr"/>
-            <a:endParaRPr lang="en-US" sz="2800" b="1" dirty="0"/>
-          </a:p>
-          <a:p>
-            <a:pPr marL="342900" indent="-342900">
-              <a:buFont typeface="Arial" panose="020B0604020202020204" pitchFamily="34" charset="0"/>
-              <a:buChar char="•"/>
-            </a:pPr>
             <a:r>
               <a:rPr lang="en-US" sz="2000" dirty="0"/>
-              <a:t>Code and slides from today: </a:t>
-            </a:r>
-            <a:r>
-              <a:rPr lang="en-US" sz="2000" dirty="0">
-                <a:hlinkClick r:id="rId2"/>
-              </a:rPr>
-              <a:t>https://github.com/GoFigr/examples</a:t>
-            </a:r>
-            <a:endParaRPr lang="en-US" sz="2000" dirty="0"/>
-          </a:p>
-          <a:p>
-            <a:pPr marL="342900" indent="-342900">
-              <a:buFont typeface="Arial" panose="020B0604020202020204" pitchFamily="34" charset="0"/>
-              <a:buChar char="•"/>
-            </a:pPr>
+              <a:t>Does it </a:t>
+            </a:r>
+            <a:r>
+              <a:rPr lang="en-US" sz="2000" u="sng" dirty="0"/>
+              <a:t>include</a:t>
+            </a:r>
             <a:r>
               <a:rPr lang="en-US" sz="2000" dirty="0"/>
-              <a:t>GoFigr signup at </a:t>
-            </a:r>
-            <a:r>
-              <a:rPr lang="en-US" sz="2000" dirty="0">
-                <a:hlinkClick r:id="rId3"/>
-              </a:rPr>
-              <a:t>https://app.gofigr.io/register</a:t>
-            </a:r>
+              <a:t> smokers?</a:t>
+            </a:r>
+          </a:p>
+        </p:txBody>
+      </p:sp>
+      <p:sp>
+        <p:nvSpPr>
+          <p:cNvPr id="6" name="Rounded Rectangle 5">
+            <a:extLst>
+              <a:ext uri="{FF2B5EF4-FFF2-40B4-BE49-F238E27FC236}">
+                <a16:creationId xmlns:a16="http://schemas.microsoft.com/office/drawing/2014/main" id="{7AF55CC5-BC4A-182C-06A8-EE3A23A60748}"/>
+              </a:ext>
+            </a:extLst>
+          </p:cNvPr>
+          <p:cNvSpPr/>
+          <p:nvPr/>
+        </p:nvSpPr>
+        <p:spPr>
+          <a:xfrm>
+            <a:off x="7554544" y="2629473"/>
+            <a:ext cx="4253567" cy="748573"/>
+          </a:xfrm>
+          <a:prstGeom prst="roundRect">
+            <a:avLst/>
+          </a:prstGeom>
+        </p:spPr>
+        <p:style>
+          <a:lnRef idx="2">
+            <a:schemeClr val="accent3"/>
+          </a:lnRef>
+          <a:fillRef idx="1">
+            <a:schemeClr val="lt1"/>
+          </a:fillRef>
+          <a:effectRef idx="0">
+            <a:schemeClr val="accent3"/>
+          </a:effectRef>
+          <a:fontRef idx="minor">
+            <a:schemeClr val="dk1"/>
+          </a:fontRef>
+        </p:style>
+        <p:txBody>
+          <a:bodyPr rtlCol="0" anchor="ctr"/>
+          <a:lstStyle/>
+          <a:p>
             <a:r>
               <a:rPr lang="en-US" sz="2000" dirty="0"/>
-              <a:t> </a:t>
-            </a:r>
-          </a:p>
-          <a:p>
-            <a:pPr marL="800100" lvl="1" indent="-342900">
-              <a:buFont typeface="Arial" panose="020B0604020202020204" pitchFamily="34" charset="0"/>
-              <a:buChar char="•"/>
-            </a:pPr>
+              <a:t>Which </a:t>
+            </a:r>
+            <a:r>
+              <a:rPr lang="en-US" sz="2000" u="sng" dirty="0"/>
+              <a:t>version</a:t>
+            </a:r>
             <a:r>
               <a:rPr lang="en-US" sz="2000" dirty="0"/>
-              <a:t>Also send me a note at </a:t>
-            </a:r>
-            <a:r>
-              <a:rPr lang="en-US" sz="2000" dirty="0">
-                <a:hlinkClick r:id="rId4"/>
-              </a:rPr>
-              <a:t>maciej@gofigr.io</a:t>
-            </a:r>
+              <a:t> of the data did we use?</a:t>
+            </a:r>
+          </a:p>
+        </p:txBody>
+      </p:sp>
+      <p:sp>
+        <p:nvSpPr>
+          <p:cNvPr id="7" name="Rounded Rectangle 6">
+            <a:extLst>
+              <a:ext uri="{FF2B5EF4-FFF2-40B4-BE49-F238E27FC236}">
+                <a16:creationId xmlns:a16="http://schemas.microsoft.com/office/drawing/2014/main" id="{C73D9BB7-D223-032F-EA00-081395768E8E}"/>
+              </a:ext>
+            </a:extLst>
+          </p:cNvPr>
+          <p:cNvSpPr/>
+          <p:nvPr/>
+        </p:nvSpPr>
+        <p:spPr>
+          <a:xfrm>
+            <a:off x="7554544" y="3571167"/>
+            <a:ext cx="4253567" cy="748573"/>
+          </a:xfrm>
+          <a:prstGeom prst="roundRect">
+            <a:avLst/>
+          </a:prstGeom>
+        </p:spPr>
+        <p:style>
+          <a:lnRef idx="2">
+            <a:schemeClr val="accent3"/>
+          </a:lnRef>
+          <a:fillRef idx="1">
+            <a:schemeClr val="lt1"/>
+          </a:fillRef>
+          <a:effectRef idx="0">
+            <a:schemeClr val="accent3"/>
+          </a:effectRef>
+          <a:fontRef idx="minor">
+            <a:schemeClr val="dk1"/>
+          </a:fontRef>
+        </p:style>
+        <p:txBody>
+          <a:bodyPr rtlCol="0" anchor="ctr"/>
+          <a:lstStyle/>
+          <a:p>
             <a:r>
               <a:rPr lang="en-US" sz="2000" dirty="0"/>
-              <a:t> for an upgrade</a:t>
-            </a:r>
-          </a:p>
-          <a:p>
-            <a:pPr marL="342900" indent="-342900">
-              <a:buFont typeface="Arial" panose="020B0604020202020204" pitchFamily="34" charset="0"/>
-              <a:buChar char="•"/>
-            </a:pPr>
-            <a:r>
-              <a:rPr lang="en-US" sz="2000" dirty="0"/>
-              <a:t>Documentation at </a:t>
-            </a:r>
-            <a:r>
-              <a:rPr lang="en-US" sz="2000" dirty="0">
-                <a:hlinkClick r:id="rId5"/>
-              </a:rPr>
-              <a:t>https://docs.gofigr.io/</a:t>
-            </a:r>
-            <a:endParaRPr lang="en-US" sz="2000" dirty="0"/>
-          </a:p>
-          <a:p>
-            <a:endParaRPr lang="en-US" sz="2000" dirty="0"/>
-          </a:p>
-          <a:p>
-            <a:pPr algn="ctr"/>
-            <a:endParaRPr lang="en-US" dirty="0"/>
+              <a:t>Can you re-do with our corporate colors? 🫠</a:t>
+            </a:r>
           </a:p>
         </p:txBody>
       </p:sp>
     </p:spTree>
     <p:extLst>
       <p:ext uri="{BB962C8B-B14F-4D97-AF65-F5344CB8AC3E}">
-        <p14:creationId xmlns:p14="http://schemas.microsoft.com/office/powerpoint/2010/main" val="121403533"/>
+        <p14:creationId xmlns:p14="http://schemas.microsoft.com/office/powerpoint/2010/main" val="4128547220"/>
       </p:ext>
     </p:extLst>
   </p:cSld>
@@ -4505,7 +4565,7 @@
           <p:cNvPr id="2" name="Title 1">
             <a:extLst>
               <a:ext uri="{FF2B5EF4-FFF2-40B4-BE49-F238E27FC236}">
-                <a16:creationId xmlns:a16="http://schemas.microsoft.com/office/drawing/2014/main" id="{97D14C25-831F-C5E7-5FEC-00F8B364947A}"/>
+                <a16:creationId xmlns:a16="http://schemas.microsoft.com/office/drawing/2014/main" id="{A096B34D-6B1C-7028-DDDA-E5FD3BCB8D62}"/>
               </a:ext>
             </a:extLst>
           </p:cNvPr>
@@ -4518,19 +4578,103 @@
         </p:nvSpPr>
         <p:spPr/>
         <p:txBody>
+          <a:bodyPr/>
+          <a:lstStyle/>
+          <a:p>
+            <a:r>
+              <a:rPr lang="en-US" dirty="0"/>
+              <a:t>Today: TCGA analysis with GoFigr</a:t>
+            </a:r>
+          </a:p>
+        </p:txBody>
+      </p:sp>
+      <p:sp>
+        <p:nvSpPr>
+          <p:cNvPr id="3" name="Content Placeholder 2">
+            <a:extLst>
+              <a:ext uri="{FF2B5EF4-FFF2-40B4-BE49-F238E27FC236}">
+                <a16:creationId xmlns:a16="http://schemas.microsoft.com/office/drawing/2014/main" id="{F9DFCED2-3E88-BD8C-9317-99FF7B5154EF}"/>
+              </a:ext>
+            </a:extLst>
+          </p:cNvPr>
+          <p:cNvSpPr>
+            <a:spLocks noGrp="1"/>
+          </p:cNvSpPr>
+          <p:nvPr>
+            <p:ph idx="1"/>
+          </p:nvPr>
+        </p:nvSpPr>
+        <p:spPr>
+          <a:xfrm>
+            <a:off x="549963" y="1258380"/>
+            <a:ext cx="5694973" cy="4914691"/>
+          </a:xfrm>
+        </p:spPr>
+        <p:txBody>
           <a:bodyPr>
-            <a:normAutofit fontScale="90000"/>
+            <a:normAutofit fontScale="92500" lnSpcReduction="10000"/>
           </a:bodyPr>
           <a:lstStyle/>
           <a:p>
             <a:r>
               <a:rPr lang="en-US" dirty="0"/>
-              <a:t>Tracking down context and reproducing figures is </a:t>
-            </a:r>
-            <a:r>
-              <a:rPr lang="en-US" u="sng" dirty="0"/>
-              <a:t>hard</a:t>
-            </a:r>
+              <a:t>GoFigr setup</a:t>
+            </a:r>
+          </a:p>
+          <a:p>
+            <a:r>
+              <a:rPr lang="en-US" dirty="0"/>
+              <a:t>TCGA download</a:t>
+            </a:r>
+          </a:p>
+          <a:p>
+            <a:r>
+              <a:rPr lang="en-US" dirty="0"/>
+              <a:t>LUAD vs LUSC differential expression in R</a:t>
+            </a:r>
+          </a:p>
+          <a:p>
+            <a:r>
+              <a:rPr lang="en-US" dirty="0"/>
+              <a:t>Follow-up analysis in Python (Jupyter)</a:t>
+            </a:r>
+          </a:p>
+          <a:p>
+            <a:r>
+              <a:rPr lang="en-US" b="1" dirty="0">
+                <a:solidFill>
+                  <a:srgbClr val="00B050"/>
+                </a:solidFill>
+              </a:rPr>
+              <a:t>Clean Room </a:t>
+            </a:r>
+            <a:r>
+              <a:rPr lang="en-US" dirty="0"/>
+              <a:t>– easy interactive reproducibility!</a:t>
+            </a:r>
+          </a:p>
+          <a:p>
+            <a:r>
+              <a:rPr lang="en-US" dirty="0"/>
+              <a:t>Combine R &amp; Python into an AI-generated slide deck with full provenance</a:t>
+            </a:r>
+          </a:p>
+          <a:p>
+            <a:pPr lvl="1"/>
+            <a:r>
+              <a:rPr lang="en-US" dirty="0"/>
+              <a:t>… and update to latest figures with a click of a button! </a:t>
+            </a:r>
+          </a:p>
+          <a:p>
+            <a:pPr lvl="1"/>
+            <a:endParaRPr lang="en-US" dirty="0"/>
+          </a:p>
+          <a:p>
+            <a:pPr marL="0" indent="0">
+              <a:buNone/>
+            </a:pPr>
+            <a:endParaRPr lang="en-US" dirty="0"/>
           </a:p>
         </p:txBody>
       </p:sp>
@@ -4539,7 +4683,7 @@
           <p:cNvPr id="4" name="Slide Number Placeholder 3">
             <a:extLst>
               <a:ext uri="{FF2B5EF4-FFF2-40B4-BE49-F238E27FC236}">
-                <a16:creationId xmlns:a16="http://schemas.microsoft.com/office/drawing/2014/main" id="{2B7FF300-3EBF-D59A-8668-0147862312B7}"/>
+                <a16:creationId xmlns:a16="http://schemas.microsoft.com/office/drawing/2014/main" id="{3AC4762B-5992-3552-6578-A2EF4DF617F8}"/>
               </a:ext>
             </a:extLst>
           </p:cNvPr>
@@ -4564,59 +4708,12 @@
           </a:p>
         </p:txBody>
       </p:sp>
-      <p:pic>
-        <p:nvPicPr>
-          <p:cNvPr id="1028" name="Picture 4" descr="Plot object">
-            <a:extLst>
-              <a:ext uri="{FF2B5EF4-FFF2-40B4-BE49-F238E27FC236}">
-                <a16:creationId xmlns:a16="http://schemas.microsoft.com/office/drawing/2014/main" id="{1783A5FB-EE6F-BB76-DB6D-4B7260C88B7A}"/>
-              </a:ext>
-            </a:extLst>
-          </p:cNvPr>
-          <p:cNvPicPr>
-            <a:picLocks noChangeAspect="1" noChangeArrowheads="1"/>
-          </p:cNvPicPr>
-          <p:nvPr/>
-        </p:nvPicPr>
-        <p:blipFill>
-          <a:blip r:embed="rId2">
-            <a:extLst>
-              <a:ext uri="{28A0092B-C50C-407E-A947-70E740481C1C}">
-                <a14:useLocalDpi xmlns:a14="http://schemas.microsoft.com/office/drawing/2010/main" val="0"/>
-              </a:ext>
-            </a:extLst>
-          </a:blip>
-          <a:srcRect/>
-          <a:stretch>
-            <a:fillRect/>
-          </a:stretch>
-        </p:blipFill>
-        <p:spPr bwMode="auto">
-          <a:xfrm>
-            <a:off x="5832783" y="1507412"/>
-            <a:ext cx="5320191" cy="3340100"/>
-          </a:xfrm>
-          <a:prstGeom prst="rect">
-            <a:avLst/>
-          </a:prstGeom>
-          <a:ln>
-            <a:noFill/>
-          </a:ln>
-          <a:effectLst>
-            <a:outerShdw blurRad="292100" dist="139700" dir="2700000" algn="tl" rotWithShape="0">
-              <a:srgbClr val="333333">
-                <a:alpha val="65000"/>
-              </a:srgbClr>
-            </a:outerShdw>
-          </a:effectLst>
-        </p:spPr>
-      </p:pic>
-      <p:sp>
-        <p:nvSpPr>
-          <p:cNvPr id="6" name="Rounded Rectangle 5">
-            <a:extLst>
-              <a:ext uri="{FF2B5EF4-FFF2-40B4-BE49-F238E27FC236}">
-                <a16:creationId xmlns:a16="http://schemas.microsoft.com/office/drawing/2014/main" id="{77D105A7-11AA-D8BA-A041-B6789520C999}"/>
+      <p:sp>
+        <p:nvSpPr>
+          <p:cNvPr id="8" name="Rounded Rectangle 7">
+            <a:extLst>
+              <a:ext uri="{FF2B5EF4-FFF2-40B4-BE49-F238E27FC236}">
+                <a16:creationId xmlns:a16="http://schemas.microsoft.com/office/drawing/2014/main" id="{FFB1AAC3-BE4D-35D5-455A-A3ADF6486555}"/>
               </a:ext>
             </a:extLst>
           </p:cNvPr>
@@ -4625,22 +4722,25 @@
         </p:nvSpPr>
         <p:spPr>
           <a:xfrm>
-            <a:off x="673388" y="1645446"/>
-            <a:ext cx="4253567" cy="748573"/>
+            <a:off x="6826975" y="1436180"/>
+            <a:ext cx="4763255" cy="3792682"/>
           </a:xfrm>
           <a:prstGeom prst="roundRect">
-            <a:avLst/>
+            <a:avLst>
+              <a:gd name="adj" fmla="val 3242"/>
+            </a:avLst>
           </a:prstGeom>
+          <a:ln w="28575"/>
         </p:spPr>
         <p:style>
           <a:lnRef idx="2">
-            <a:schemeClr val="accent3"/>
+            <a:schemeClr val="accent4"/>
           </a:lnRef>
           <a:fillRef idx="1">
             <a:schemeClr val="lt1"/>
           </a:fillRef>
           <a:effectRef idx="0">
-            <a:schemeClr val="accent3"/>
+            <a:schemeClr val="accent4"/>
           </a:effectRef>
           <a:fontRef idx="minor">
             <a:schemeClr val="dk1"/>
@@ -4650,390 +4750,163 @@
           <a:bodyPr rtlCol="0" anchor="ctr"/>
           <a:lstStyle/>
           <a:p>
+            <a:pPr algn="ctr"/>
+            <a:endParaRPr lang="en-US" sz="2800" b="1" dirty="0"/>
+          </a:p>
+          <a:p>
+            <a:pPr algn="ctr"/>
+            <a:r>
+              <a:rPr lang="en-US" sz="2800" b="1" dirty="0"/>
+              <a:t>Free stuff</a:t>
+            </a:r>
+          </a:p>
+          <a:p>
+            <a:pPr algn="ctr"/>
+            <a:endParaRPr lang="en-US" sz="2800" b="1" dirty="0"/>
+          </a:p>
+          <a:p>
+            <a:pPr marL="342900" indent="-342900">
+              <a:buFont typeface="Arial" panose="020B0604020202020204" pitchFamily="34" charset="0"/>
+              <a:buChar char="•"/>
+            </a:pPr>
             <a:r>
               <a:rPr lang="en-US" sz="2000" dirty="0"/>
-              <a:t>Does this figure </a:t>
-            </a:r>
-            <a:r>
-              <a:rPr lang="en-US" sz="2000" u="sng" dirty="0"/>
-              <a:t>include</a:t>
-            </a:r>
+              <a:t>Code and slides from today: </a:t>
+            </a:r>
+            <a:r>
+              <a:rPr lang="en-US" sz="2000" dirty="0">
+                <a:solidFill>
+                  <a:schemeClr val="accent4"/>
+                </a:solidFill>
+                <a:hlinkClick r:id="rId3">
+                  <a:extLst>
+                    <a:ext uri="{A12FA001-AC4F-418D-AE19-62706E023703}">
+                      <ahyp:hlinkClr xmlns:ahyp="http://schemas.microsoft.com/office/drawing/2018/hyperlinkcolor" val="tx"/>
+                    </a:ext>
+                  </a:extLst>
+                </a:hlinkClick>
+              </a:rPr>
+              <a:t>https://github.com/GoFigr/examples</a:t>
+            </a:r>
+            <a:endParaRPr lang="en-US" sz="2000" dirty="0">
+              <a:solidFill>
+                <a:schemeClr val="accent4"/>
+              </a:solidFill>
+            </a:endParaRPr>
+          </a:p>
+          <a:p>
+            <a:pPr marL="342900" indent="-342900">
+              <a:buFont typeface="Arial" panose="020B0604020202020204" pitchFamily="34" charset="0"/>
+              <a:buChar char="•"/>
+            </a:pPr>
             <a:r>
               <a:rPr lang="en-US" sz="2000" dirty="0"/>
-              <a:t> smokers?</a:t>
-            </a:r>
-          </a:p>
-        </p:txBody>
-      </p:sp>
-      <p:sp>
-        <p:nvSpPr>
-          <p:cNvPr id="7" name="Rounded Rectangle 6">
-            <a:extLst>
-              <a:ext uri="{FF2B5EF4-FFF2-40B4-BE49-F238E27FC236}">
-                <a16:creationId xmlns:a16="http://schemas.microsoft.com/office/drawing/2014/main" id="{34095A05-B8EF-796F-08F7-006839DDDB2B}"/>
-              </a:ext>
-            </a:extLst>
-          </p:cNvPr>
-          <p:cNvSpPr/>
-          <p:nvPr/>
-        </p:nvSpPr>
-        <p:spPr>
-          <a:xfrm>
-            <a:off x="673388" y="2587140"/>
-            <a:ext cx="4253567" cy="748573"/>
-          </a:xfrm>
-          <a:prstGeom prst="roundRect">
-            <a:avLst/>
-          </a:prstGeom>
-        </p:spPr>
-        <p:style>
-          <a:lnRef idx="2">
-            <a:schemeClr val="accent3"/>
-          </a:lnRef>
-          <a:fillRef idx="1">
-            <a:schemeClr val="lt1"/>
-          </a:fillRef>
-          <a:effectRef idx="0">
-            <a:schemeClr val="accent3"/>
-          </a:effectRef>
-          <a:fontRef idx="minor">
-            <a:schemeClr val="dk1"/>
-          </a:fontRef>
-        </p:style>
-        <p:txBody>
-          <a:bodyPr rtlCol="0" anchor="ctr"/>
-          <a:lstStyle/>
-          <a:p>
+              <a:t>GoFigr signup at </a:t>
+            </a:r>
+            <a:r>
+              <a:rPr lang="en-US" sz="2000" dirty="0">
+                <a:solidFill>
+                  <a:schemeClr val="accent4"/>
+                </a:solidFill>
+                <a:hlinkClick r:id="rId4">
+                  <a:extLst>
+                    <a:ext uri="{A12FA001-AC4F-418D-AE19-62706E023703}">
+                      <ahyp:hlinkClr xmlns:ahyp="http://schemas.microsoft.com/office/drawing/2018/hyperlinkcolor" val="tx"/>
+                    </a:ext>
+                  </a:extLst>
+                </a:hlinkClick>
+              </a:rPr>
+              <a:t>https://app.gofigr.io/register</a:t>
+            </a:r>
+            <a:r>
+              <a:rPr lang="en-US" sz="2000" dirty="0">
+                <a:solidFill>
+                  <a:schemeClr val="accent4"/>
+                </a:solidFill>
+              </a:rPr>
+              <a:t> </a:t>
+            </a:r>
+          </a:p>
+          <a:p>
+            <a:pPr marL="800100" lvl="1" indent="-342900">
+              <a:buFont typeface="Arial" panose="020B0604020202020204" pitchFamily="34" charset="0"/>
+              <a:buChar char="•"/>
+            </a:pPr>
             <a:r>
               <a:rPr lang="en-US" sz="2000" dirty="0"/>
-              <a:t>Which </a:t>
-            </a:r>
-            <a:r>
-              <a:rPr lang="en-US" sz="2000" u="sng" dirty="0"/>
-              <a:t>version</a:t>
+              <a:t>Also send me a note at </a:t>
+            </a:r>
+            <a:r>
+              <a:rPr lang="en-US" sz="2000" dirty="0">
+                <a:solidFill>
+                  <a:schemeClr val="accent4"/>
+                </a:solidFill>
+                <a:hlinkClick r:id="rId5">
+                  <a:extLst>
+                    <a:ext uri="{A12FA001-AC4F-418D-AE19-62706E023703}">
+                      <ahyp:hlinkClr xmlns:ahyp="http://schemas.microsoft.com/office/drawing/2018/hyperlinkcolor" val="tx"/>
+                    </a:ext>
+                  </a:extLst>
+                </a:hlinkClick>
+              </a:rPr>
+              <a:t>maciej@gofigr.io</a:t>
+            </a:r>
+            <a:r>
+              <a:rPr lang="en-US" sz="2000" dirty="0">
+                <a:solidFill>
+                  <a:schemeClr val="accent4"/>
+                </a:solidFill>
+              </a:rPr>
+              <a:t> </a:t>
             </a:r>
             <a:r>
               <a:rPr lang="en-US" sz="2000" dirty="0"/>
-              <a:t> of the data did we use?</a:t>
-            </a:r>
-          </a:p>
-        </p:txBody>
-      </p:sp>
-      <p:sp>
-        <p:nvSpPr>
-          <p:cNvPr id="8" name="Rounded Rectangle 7">
-            <a:extLst>
-              <a:ext uri="{FF2B5EF4-FFF2-40B4-BE49-F238E27FC236}">
-                <a16:creationId xmlns:a16="http://schemas.microsoft.com/office/drawing/2014/main" id="{47D45D03-02B6-C5BE-A974-2380856DDE13}"/>
-              </a:ext>
-            </a:extLst>
-          </p:cNvPr>
-          <p:cNvSpPr/>
-          <p:nvPr/>
-        </p:nvSpPr>
-        <p:spPr>
-          <a:xfrm>
-            <a:off x="673388" y="3528834"/>
-            <a:ext cx="4253567" cy="748573"/>
-          </a:xfrm>
-          <a:prstGeom prst="roundRect">
-            <a:avLst/>
-          </a:prstGeom>
-        </p:spPr>
-        <p:style>
-          <a:lnRef idx="2">
-            <a:schemeClr val="accent3"/>
-          </a:lnRef>
-          <a:fillRef idx="1">
-            <a:schemeClr val="lt1"/>
-          </a:fillRef>
-          <a:effectRef idx="0">
-            <a:schemeClr val="accent3"/>
-          </a:effectRef>
-          <a:fontRef idx="minor">
-            <a:schemeClr val="dk1"/>
-          </a:fontRef>
-        </p:style>
-        <p:txBody>
-          <a:bodyPr rtlCol="0" anchor="ctr"/>
-          <a:lstStyle/>
-          <a:p>
+              <a:t>for an upgrade</a:t>
+            </a:r>
+          </a:p>
+          <a:p>
+            <a:pPr marL="342900" indent="-342900">
+              <a:buFont typeface="Arial" panose="020B0604020202020204" pitchFamily="34" charset="0"/>
+              <a:buChar char="•"/>
+            </a:pPr>
             <a:r>
               <a:rPr lang="en-US" sz="2000" dirty="0"/>
-              <a:t>Can you re-do with our corporate colors? 🫠</a:t>
-            </a:r>
-          </a:p>
-        </p:txBody>
-      </p:sp>
-      <p:pic>
-        <p:nvPicPr>
-          <p:cNvPr id="1030" name="Picture 6" descr="Punctuation of Life: Question Mark | by Christal Luster | Medium">
-            <a:extLst>
-              <a:ext uri="{FF2B5EF4-FFF2-40B4-BE49-F238E27FC236}">
-                <a16:creationId xmlns:a16="http://schemas.microsoft.com/office/drawing/2014/main" id="{BBF90BF1-7DD0-EC08-8611-F623E314F024}"/>
-              </a:ext>
-            </a:extLst>
-          </p:cNvPr>
-          <p:cNvPicPr>
-            <a:picLocks noChangeAspect="1" noChangeArrowheads="1"/>
-          </p:cNvPicPr>
-          <p:nvPr/>
-        </p:nvPicPr>
-        <p:blipFill>
-          <a:blip r:embed="rId3">
-            <a:extLst>
-              <a:ext uri="{28A0092B-C50C-407E-A947-70E740481C1C}">
-                <a14:useLocalDpi xmlns:a14="http://schemas.microsoft.com/office/drawing/2010/main" val="0"/>
-              </a:ext>
-            </a:extLst>
-          </a:blip>
-          <a:srcRect/>
-          <a:stretch>
-            <a:fillRect/>
-          </a:stretch>
-        </p:blipFill>
-        <p:spPr bwMode="auto">
-          <a:xfrm>
-            <a:off x="99966" y="4555117"/>
-            <a:ext cx="1319135" cy="1314874"/>
-          </a:xfrm>
-          <a:prstGeom prst="rect">
-            <a:avLst/>
-          </a:prstGeom>
-          <a:noFill/>
-          <a:extLst>
-            <a:ext uri="{909E8E84-426E-40DD-AFC4-6F175D3DCCD1}">
-              <a14:hiddenFill xmlns:a14="http://schemas.microsoft.com/office/drawing/2010/main">
+              <a:t>Documentation at </a:t>
+            </a:r>
+            <a:r>
+              <a:rPr lang="en-US" sz="2000" dirty="0">
                 <a:solidFill>
-                  <a:srgbClr val="FFFFFF"/>
+                  <a:schemeClr val="accent4"/>
                 </a:solidFill>
-              </a14:hiddenFill>
-            </a:ext>
-          </a:extLst>
-        </p:spPr>
-      </p:pic>
-      <p:sp>
-        <p:nvSpPr>
-          <p:cNvPr id="14" name="Rounded Rectangle 13">
-            <a:extLst>
-              <a:ext uri="{FF2B5EF4-FFF2-40B4-BE49-F238E27FC236}">
-                <a16:creationId xmlns:a16="http://schemas.microsoft.com/office/drawing/2014/main" id="{08480127-4A6E-AA35-5B54-F1EA56C6063D}"/>
-              </a:ext>
-            </a:extLst>
-          </p:cNvPr>
-          <p:cNvSpPr/>
-          <p:nvPr/>
-        </p:nvSpPr>
-        <p:spPr>
-          <a:xfrm>
-            <a:off x="1920150" y="5340035"/>
-            <a:ext cx="8924307" cy="820122"/>
-          </a:xfrm>
-          <a:prstGeom prst="roundRect">
-            <a:avLst/>
-          </a:prstGeom>
-        </p:spPr>
-        <p:style>
-          <a:lnRef idx="2">
-            <a:schemeClr val="accent6">
-              <a:shade val="15000"/>
-            </a:schemeClr>
-          </a:lnRef>
-          <a:fillRef idx="1">
-            <a:schemeClr val="accent6"/>
-          </a:fillRef>
-          <a:effectRef idx="0">
-            <a:schemeClr val="accent6"/>
-          </a:effectRef>
-          <a:fontRef idx="minor">
-            <a:schemeClr val="lt1"/>
-          </a:fontRef>
-        </p:style>
-        <p:txBody>
-          <a:bodyPr rtlCol="0" anchor="ctr"/>
-          <a:lstStyle/>
+                <a:hlinkClick r:id="rId6">
+                  <a:extLst>
+                    <a:ext uri="{A12FA001-AC4F-418D-AE19-62706E023703}">
+                      <ahyp:hlinkClr xmlns:ahyp="http://schemas.microsoft.com/office/drawing/2018/hyperlinkcolor" val="tx"/>
+                    </a:ext>
+                  </a:extLst>
+                </a:hlinkClick>
+              </a:rPr>
+              <a:t>https://docs.gofigr.io/</a:t>
+            </a:r>
+            <a:endParaRPr lang="en-US" sz="2000" dirty="0">
+              <a:solidFill>
+                <a:schemeClr val="accent4"/>
+              </a:solidFill>
+            </a:endParaRPr>
+          </a:p>
+          <a:p>
+            <a:endParaRPr lang="en-US" sz="2000" dirty="0"/>
+          </a:p>
           <a:p>
             <a:pPr algn="ctr"/>
-            <a:r>
-              <a:rPr lang="en-US" sz="2400" dirty="0"/>
-              <a:t>Most figures are shared informally over Teams/Slack/Email. How do you keep track?</a:t>
-            </a:r>
-          </a:p>
-        </p:txBody>
-      </p:sp>
-      <p:pic>
-        <p:nvPicPr>
-          <p:cNvPr id="15" name="Picture 10" descr="Microsoft PowerPoint - Wikipedia">
-            <a:extLst>
-              <a:ext uri="{FF2B5EF4-FFF2-40B4-BE49-F238E27FC236}">
-                <a16:creationId xmlns:a16="http://schemas.microsoft.com/office/drawing/2014/main" id="{0353782A-56B4-5916-E865-0FC5AA4FC02A}"/>
-              </a:ext>
-            </a:extLst>
-          </p:cNvPr>
-          <p:cNvPicPr>
-            <a:picLocks noChangeAspect="1" noChangeArrowheads="1"/>
-          </p:cNvPicPr>
-          <p:nvPr/>
-        </p:nvPicPr>
-        <p:blipFill>
-          <a:blip r:embed="rId4">
-            <a:extLst>
-              <a:ext uri="{28A0092B-C50C-407E-A947-70E740481C1C}">
-                <a14:useLocalDpi xmlns:a14="http://schemas.microsoft.com/office/drawing/2010/main" val="0"/>
-              </a:ext>
-            </a:extLst>
-          </a:blip>
-          <a:srcRect/>
-          <a:stretch>
-            <a:fillRect/>
-          </a:stretch>
-        </p:blipFill>
-        <p:spPr bwMode="auto">
-          <a:xfrm>
-            <a:off x="5371639" y="1354136"/>
-            <a:ext cx="564519" cy="525753"/>
-          </a:xfrm>
-          <a:prstGeom prst="rect">
-            <a:avLst/>
-          </a:prstGeom>
-          <a:noFill/>
-          <a:extLst>
-            <a:ext uri="{909E8E84-426E-40DD-AFC4-6F175D3DCCD1}">
-              <a14:hiddenFill xmlns:a14="http://schemas.microsoft.com/office/drawing/2010/main">
-                <a:solidFill>
-                  <a:srgbClr val="FFFFFF"/>
-                </a:solidFill>
-              </a14:hiddenFill>
-            </a:ext>
-          </a:extLst>
-        </p:spPr>
-      </p:pic>
-      <p:pic>
-        <p:nvPicPr>
-          <p:cNvPr id="16" name="Picture 18" descr="Microsoft Teams - South Piedmont Community College">
-            <a:extLst>
-              <a:ext uri="{FF2B5EF4-FFF2-40B4-BE49-F238E27FC236}">
-                <a16:creationId xmlns:a16="http://schemas.microsoft.com/office/drawing/2014/main" id="{6E9A0529-14B3-6D71-FED7-5B81377ECB70}"/>
-              </a:ext>
-            </a:extLst>
-          </p:cNvPr>
-          <p:cNvPicPr>
-            <a:picLocks noChangeAspect="1" noChangeArrowheads="1"/>
-          </p:cNvPicPr>
-          <p:nvPr/>
-        </p:nvPicPr>
-        <p:blipFill rotWithShape="1">
-          <a:blip r:embed="rId5">
-            <a:extLst>
-              <a:ext uri="{28A0092B-C50C-407E-A947-70E740481C1C}">
-                <a14:useLocalDpi xmlns:a14="http://schemas.microsoft.com/office/drawing/2010/main" val="0"/>
-              </a:ext>
-            </a:extLst>
-          </a:blip>
-          <a:srcRect l="27965" r="29296" b="35302"/>
-          <a:stretch/>
-        </p:blipFill>
-        <p:spPr bwMode="auto">
-          <a:xfrm>
-            <a:off x="10844457" y="1269742"/>
-            <a:ext cx="617034" cy="525752"/>
-          </a:xfrm>
-          <a:prstGeom prst="rect">
-            <a:avLst/>
-          </a:prstGeom>
-          <a:noFill/>
-          <a:extLst>
-            <a:ext uri="{909E8E84-426E-40DD-AFC4-6F175D3DCCD1}">
-              <a14:hiddenFill xmlns:a14="http://schemas.microsoft.com/office/drawing/2010/main">
-                <a:solidFill>
-                  <a:srgbClr val="FFFFFF"/>
-                </a:solidFill>
-              </a14:hiddenFill>
-            </a:ext>
-          </a:extLst>
-        </p:spPr>
-      </p:pic>
-      <p:pic>
-        <p:nvPicPr>
-          <p:cNvPr id="17" name="Picture 8">
-            <a:extLst>
-              <a:ext uri="{FF2B5EF4-FFF2-40B4-BE49-F238E27FC236}">
-                <a16:creationId xmlns:a16="http://schemas.microsoft.com/office/drawing/2014/main" id="{E39EA72F-E500-45FE-38FF-E40F86A91601}"/>
-              </a:ext>
-            </a:extLst>
-          </p:cNvPr>
-          <p:cNvPicPr>
-            <a:picLocks noChangeAspect="1" noChangeArrowheads="1"/>
-          </p:cNvPicPr>
-          <p:nvPr/>
-        </p:nvPicPr>
-        <p:blipFill>
-          <a:blip r:embed="rId6">
-            <a:extLst>
-              <a:ext uri="{28A0092B-C50C-407E-A947-70E740481C1C}">
-                <a14:useLocalDpi xmlns:a14="http://schemas.microsoft.com/office/drawing/2010/main" val="0"/>
-              </a:ext>
-            </a:extLst>
-          </a:blip>
-          <a:srcRect/>
-          <a:stretch>
-            <a:fillRect/>
-          </a:stretch>
-        </p:blipFill>
-        <p:spPr bwMode="auto">
-          <a:xfrm>
-            <a:off x="10584670" y="4636629"/>
-            <a:ext cx="1367133" cy="348726"/>
-          </a:xfrm>
-          <a:prstGeom prst="rect">
-            <a:avLst/>
-          </a:prstGeom>
-          <a:noFill/>
-          <a:extLst>
-            <a:ext uri="{909E8E84-426E-40DD-AFC4-6F175D3DCCD1}">
-              <a14:hiddenFill xmlns:a14="http://schemas.microsoft.com/office/drawing/2010/main">
-                <a:solidFill>
-                  <a:srgbClr val="FFFFFF"/>
-                </a:solidFill>
-              </a14:hiddenFill>
-            </a:ext>
-          </a:extLst>
-        </p:spPr>
-      </p:pic>
-      <p:pic>
-        <p:nvPicPr>
-          <p:cNvPr id="18" name="Picture 17">
-            <a:extLst>
-              <a:ext uri="{FF2B5EF4-FFF2-40B4-BE49-F238E27FC236}">
-                <a16:creationId xmlns:a16="http://schemas.microsoft.com/office/drawing/2014/main" id="{FD7D1FF0-6DE5-C72F-AB60-A43B718DE9E1}"/>
-              </a:ext>
-            </a:extLst>
-          </p:cNvPr>
-          <p:cNvPicPr>
-            <a:picLocks noChangeAspect="1"/>
-          </p:cNvPicPr>
-          <p:nvPr/>
-        </p:nvPicPr>
-        <p:blipFill>
-          <a:blip r:embed="rId7"/>
-          <a:stretch>
-            <a:fillRect/>
-          </a:stretch>
-        </p:blipFill>
-        <p:spPr>
-          <a:xfrm>
-            <a:off x="5359736" y="4548389"/>
-            <a:ext cx="576422" cy="536793"/>
-          </a:xfrm>
-          <a:prstGeom prst="rect">
-            <a:avLst/>
-          </a:prstGeom>
-        </p:spPr>
-      </p:pic>
+            <a:endParaRPr lang="en-US" dirty="0"/>
+          </a:p>
+        </p:txBody>
+      </p:sp>
     </p:spTree>
     <p:extLst>
       <p:ext uri="{BB962C8B-B14F-4D97-AF65-F5344CB8AC3E}">
-        <p14:creationId xmlns:p14="http://schemas.microsoft.com/office/powerpoint/2010/main" val="643248271"/>
+        <p14:creationId xmlns:p14="http://schemas.microsoft.com/office/powerpoint/2010/main" val="121403533"/>
       </p:ext>
     </p:extLst>
   </p:cSld>
@@ -5060,42 +4933,12 @@
           <a:chExt cx="0" cy="0"/>
         </a:xfrm>
       </p:grpSpPr>
-      <p:pic>
-        <p:nvPicPr>
-          <p:cNvPr id="17" name="Picture 16">
-            <a:extLst>
-              <a:ext uri="{FF2B5EF4-FFF2-40B4-BE49-F238E27FC236}">
-                <a16:creationId xmlns:a16="http://schemas.microsoft.com/office/drawing/2014/main" id="{98F244A8-EB26-970E-75F9-FAFCCF59ECCC}"/>
-              </a:ext>
-            </a:extLst>
-          </p:cNvPr>
-          <p:cNvPicPr>
-            <a:picLocks noChangeAspect="1"/>
-          </p:cNvPicPr>
-          <p:nvPr/>
-        </p:nvPicPr>
-        <p:blipFill>
-          <a:blip r:embed="rId2"/>
-          <a:stretch>
-            <a:fillRect/>
-          </a:stretch>
-        </p:blipFill>
-        <p:spPr>
-          <a:xfrm>
-            <a:off x="296577" y="1339784"/>
-            <a:ext cx="6686611" cy="4680627"/>
-          </a:xfrm>
-          <a:prstGeom prst="rect">
-            <a:avLst/>
-          </a:prstGeom>
-        </p:spPr>
-      </p:pic>
       <p:sp>
         <p:nvSpPr>
           <p:cNvPr id="2" name="Title 1">
             <a:extLst>
               <a:ext uri="{FF2B5EF4-FFF2-40B4-BE49-F238E27FC236}">
-                <a16:creationId xmlns:a16="http://schemas.microsoft.com/office/drawing/2014/main" id="{4D12ABFF-8393-32C6-4086-1A1CA8D02625}"/>
+                <a16:creationId xmlns:a16="http://schemas.microsoft.com/office/drawing/2014/main" id="{3FC46504-5137-B067-E21E-59D03DC37E4A}"/>
               </a:ext>
             </a:extLst>
           </p:cNvPr>
@@ -5106,21 +4949,14 @@
             <p:ph type="title"/>
           </p:nvPr>
         </p:nvSpPr>
-        <p:spPr>
-          <a:xfrm>
-            <a:off x="233569" y="250230"/>
-            <a:ext cx="11487863" cy="753617"/>
-          </a:xfrm>
-        </p:spPr>
-        <p:txBody>
-          <a:bodyPr>
-            <a:normAutofit fontScale="90000"/>
-          </a:bodyPr>
+        <p:spPr/>
+        <p:txBody>
+          <a:bodyPr/>
           <a:lstStyle/>
           <a:p>
             <a:r>
               <a:rPr lang="en-US" dirty="0"/>
-              <a:t>What if you could embed context in the figure itself?</a:t>
+              <a:t>Thank you!</a:t>
             </a:r>
           </a:p>
         </p:txBody>
@@ -5130,7 +4966,7 @@
           <p:cNvPr id="4" name="Slide Number Placeholder 3">
             <a:extLst>
               <a:ext uri="{FF2B5EF4-FFF2-40B4-BE49-F238E27FC236}">
-                <a16:creationId xmlns:a16="http://schemas.microsoft.com/office/drawing/2014/main" id="{510D2D01-5D58-4C68-C96D-0AF73EDC4CC9}"/>
+                <a16:creationId xmlns:a16="http://schemas.microsoft.com/office/drawing/2014/main" id="{56134A54-0490-0284-919F-D80B58105D4F}"/>
               </a:ext>
             </a:extLst>
           </p:cNvPr>
@@ -5157,456 +4993,94 @@
       </p:sp>
       <p:sp>
         <p:nvSpPr>
-          <p:cNvPr id="7" name="Rounded Rectangle 6">
-            <a:extLst>
-              <a:ext uri="{FF2B5EF4-FFF2-40B4-BE49-F238E27FC236}">
-                <a16:creationId xmlns:a16="http://schemas.microsoft.com/office/drawing/2014/main" id="{DE94A7BE-3717-4AB6-71ED-941D9F2127CA}"/>
-              </a:ext>
-            </a:extLst>
-          </p:cNvPr>
-          <p:cNvSpPr/>
-          <p:nvPr/>
+          <p:cNvPr id="3" name="Content Placeholder 2">
+            <a:extLst>
+              <a:ext uri="{FF2B5EF4-FFF2-40B4-BE49-F238E27FC236}">
+                <a16:creationId xmlns:a16="http://schemas.microsoft.com/office/drawing/2014/main" id="{C6670613-4E7D-228E-78BA-82B655751146}"/>
+              </a:ext>
+            </a:extLst>
+          </p:cNvPr>
+          <p:cNvSpPr>
+            <a:spLocks noGrp="1"/>
+          </p:cNvSpPr>
+          <p:nvPr>
+            <p:ph idx="1"/>
+          </p:nvPr>
         </p:nvSpPr>
         <p:spPr>
           <a:xfrm>
-            <a:off x="8258546" y="2093392"/>
-            <a:ext cx="2641600" cy="558800"/>
+            <a:off x="384156" y="1258380"/>
+            <a:ext cx="11257877" cy="4914691"/>
           </a:xfrm>
-          <a:prstGeom prst="roundRect">
-            <a:avLst/>
-          </a:prstGeom>
         </p:spPr>
-        <p:style>
-          <a:lnRef idx="2">
-            <a:schemeClr val="accent3">
-              <a:shade val="15000"/>
-            </a:schemeClr>
-          </a:lnRef>
-          <a:fillRef idx="1">
-            <a:schemeClr val="accent3"/>
-          </a:fillRef>
-          <a:effectRef idx="0">
-            <a:schemeClr val="accent3"/>
-          </a:effectRef>
-          <a:fontRef idx="minor">
-            <a:schemeClr val="lt1"/>
-          </a:fontRef>
-        </p:style>
-        <p:txBody>
-          <a:bodyPr rtlCol="0" anchor="ctr"/>
-          <a:lstStyle/>
-          <a:p>
-            <a:pPr algn="ctr"/>
+        <p:txBody>
+          <a:bodyPr/>
+          <a:lstStyle/>
+          <a:p>
+            <a:pPr marL="0" indent="0" algn="ctr">
+              <a:buNone/>
+            </a:pPr>
             <a:r>
               <a:rPr lang="en-US" dirty="0"/>
-              <a:t>Code</a:t>
-            </a:r>
-          </a:p>
-        </p:txBody>
-      </p:sp>
-      <p:sp>
-        <p:nvSpPr>
-          <p:cNvPr id="8" name="Rounded Rectangle 7">
-            <a:extLst>
-              <a:ext uri="{FF2B5EF4-FFF2-40B4-BE49-F238E27FC236}">
-                <a16:creationId xmlns:a16="http://schemas.microsoft.com/office/drawing/2014/main" id="{BB621EEB-ED82-F279-C53B-58370A9D314E}"/>
-              </a:ext>
-            </a:extLst>
-          </p:cNvPr>
-          <p:cNvSpPr/>
-          <p:nvPr/>
-        </p:nvSpPr>
-        <p:spPr>
-          <a:xfrm>
-            <a:off x="8258546" y="2964929"/>
-            <a:ext cx="2641600" cy="558800"/>
-          </a:xfrm>
-          <a:prstGeom prst="roundRect">
-            <a:avLst/>
-          </a:prstGeom>
-        </p:spPr>
-        <p:style>
-          <a:lnRef idx="2">
-            <a:schemeClr val="accent3">
-              <a:shade val="15000"/>
-            </a:schemeClr>
-          </a:lnRef>
-          <a:fillRef idx="1">
-            <a:schemeClr val="accent3"/>
-          </a:fillRef>
-          <a:effectRef idx="0">
-            <a:schemeClr val="accent3"/>
-          </a:effectRef>
-          <a:fontRef idx="minor">
-            <a:schemeClr val="lt1"/>
-          </a:fontRef>
-        </p:style>
-        <p:txBody>
-          <a:bodyPr rtlCol="0" anchor="ctr"/>
-          <a:lstStyle/>
-          <a:p>
-            <a:pPr algn="ctr"/>
+              <a:t>Please visit </a:t>
+            </a:r>
+            <a:r>
+              <a:rPr lang="en-US" dirty="0">
+                <a:solidFill>
+                  <a:schemeClr val="accent4"/>
+                </a:solidFill>
+                <a:hlinkClick r:id="rId2">
+                  <a:extLst>
+                    <a:ext uri="{A12FA001-AC4F-418D-AE19-62706E023703}">
+                      <ahyp:hlinkClr xmlns:ahyp="http://schemas.microsoft.com/office/drawing/2018/hyperlinkcolor" val="tx"/>
+                    </a:ext>
+                  </a:extLst>
+                </a:hlinkClick>
+              </a:rPr>
+              <a:t>https://gofigr.io</a:t>
+            </a:r>
+            <a:r>
+              <a:rPr lang="en-US" dirty="0">
+                <a:solidFill>
+                  <a:schemeClr val="accent4"/>
+                </a:solidFill>
+              </a:rPr>
+              <a:t> </a:t>
+            </a:r>
             <a:r>
               <a:rPr lang="en-US" dirty="0"/>
-              <a:t>Data</a:t>
-            </a:r>
-          </a:p>
-        </p:txBody>
-      </p:sp>
-      <p:sp>
-        <p:nvSpPr>
-          <p:cNvPr id="10" name="Rounded Rectangle 9">
-            <a:extLst>
-              <a:ext uri="{FF2B5EF4-FFF2-40B4-BE49-F238E27FC236}">
-                <a16:creationId xmlns:a16="http://schemas.microsoft.com/office/drawing/2014/main" id="{5860827A-D8DD-32FF-BCDD-780107C4DF70}"/>
-              </a:ext>
-            </a:extLst>
-          </p:cNvPr>
-          <p:cNvSpPr/>
-          <p:nvPr/>
-        </p:nvSpPr>
-        <p:spPr>
-          <a:xfrm>
-            <a:off x="8258546" y="3836467"/>
-            <a:ext cx="2641600" cy="558800"/>
-          </a:xfrm>
-          <a:prstGeom prst="roundRect">
-            <a:avLst/>
-          </a:prstGeom>
-        </p:spPr>
-        <p:style>
-          <a:lnRef idx="2">
-            <a:schemeClr val="accent3">
-              <a:shade val="15000"/>
-            </a:schemeClr>
-          </a:lnRef>
-          <a:fillRef idx="1">
-            <a:schemeClr val="accent3"/>
-          </a:fillRef>
-          <a:effectRef idx="0">
-            <a:schemeClr val="accent3"/>
-          </a:effectRef>
-          <a:fontRef idx="minor">
-            <a:schemeClr val="lt1"/>
-          </a:fontRef>
-        </p:style>
-        <p:txBody>
-          <a:bodyPr rtlCol="0" anchor="ctr"/>
-          <a:lstStyle/>
-          <a:p>
-            <a:pPr algn="ctr"/>
+              <a:t>for example figures and demo videos</a:t>
+            </a:r>
+          </a:p>
+          <a:p>
+            <a:pPr marL="0" indent="0" algn="ctr">
+              <a:buNone/>
+            </a:pPr>
+            <a:endParaRPr lang="en-US" dirty="0"/>
+          </a:p>
+          <a:p>
+            <a:pPr marL="0" indent="0" algn="ctr">
+              <a:buNone/>
+            </a:pPr>
             <a:r>
               <a:rPr lang="en-US" dirty="0"/>
-              <a:t>Metadata (e.g. informed consent)</a:t>
-            </a:r>
-          </a:p>
-        </p:txBody>
-      </p:sp>
-      <p:sp>
-        <p:nvSpPr>
-          <p:cNvPr id="11" name="Rounded Rectangle 10">
-            <a:extLst>
-              <a:ext uri="{FF2B5EF4-FFF2-40B4-BE49-F238E27FC236}">
-                <a16:creationId xmlns:a16="http://schemas.microsoft.com/office/drawing/2014/main" id="{79C28480-E115-FF59-4838-16E3917226AC}"/>
-              </a:ext>
-            </a:extLst>
-          </p:cNvPr>
-          <p:cNvSpPr/>
-          <p:nvPr/>
-        </p:nvSpPr>
-        <p:spPr>
-          <a:xfrm>
-            <a:off x="8258546" y="4708005"/>
-            <a:ext cx="2641600" cy="558800"/>
-          </a:xfrm>
-          <a:prstGeom prst="roundRect">
-            <a:avLst/>
-          </a:prstGeom>
-        </p:spPr>
-        <p:style>
-          <a:lnRef idx="2">
-            <a:schemeClr val="accent3">
-              <a:shade val="15000"/>
-            </a:schemeClr>
-          </a:lnRef>
-          <a:fillRef idx="1">
-            <a:schemeClr val="accent3"/>
-          </a:fillRef>
-          <a:effectRef idx="0">
-            <a:schemeClr val="accent3"/>
-          </a:effectRef>
-          <a:fontRef idx="minor">
-            <a:schemeClr val="lt1"/>
-          </a:fontRef>
-        </p:style>
-        <p:txBody>
-          <a:bodyPr rtlCol="0" anchor="ctr"/>
-          <a:lstStyle/>
-          <a:p>
-            <a:pPr algn="ctr"/>
+              <a:t>Feel free to email me (</a:t>
+            </a:r>
+            <a:r>
+              <a:rPr lang="en-US" dirty="0" err="1"/>
+              <a:t>maciej@gofigr.io</a:t>
+            </a:r>
             <a:r>
               <a:rPr lang="en-US" dirty="0"/>
-              <a:t>Search</a:t>
-            </a:r>
-          </a:p>
-        </p:txBody>
-      </p:sp>
-      <p:cxnSp>
-        <p:nvCxnSpPr>
-          <p:cNvPr id="13" name="Elbow Connector 12">
-            <a:extLst>
-              <a:ext uri="{FF2B5EF4-FFF2-40B4-BE49-F238E27FC236}">
-                <a16:creationId xmlns:a16="http://schemas.microsoft.com/office/drawing/2014/main" id="{5A4FFAF4-9974-F217-9D8C-BC722FBA6362}"/>
-              </a:ext>
-            </a:extLst>
-          </p:cNvPr>
-          <p:cNvCxnSpPr>
-            <a:cxnSpLocks/>
-            <a:stCxn id="21" idx="3"/>
-            <a:endCxn id="8" idx="1"/>
-          </p:cNvCxnSpPr>
-          <p:nvPr/>
-        </p:nvCxnSpPr>
-        <p:spPr>
-          <a:xfrm flipV="1">
-            <a:off x="6641431" y="3244329"/>
-            <a:ext cx="1617115" cy="2273887"/>
-          </a:xfrm>
-          <a:prstGeom prst="bentConnector3">
-            <a:avLst>
-              <a:gd name="adj1" fmla="val 50000"/>
-            </a:avLst>
-          </a:prstGeom>
-          <a:ln w="57150">
-            <a:solidFill>
-              <a:schemeClr val="tx1"/>
-            </a:solidFill>
-            <a:tailEnd type="triangle"/>
-          </a:ln>
-        </p:spPr>
-        <p:style>
-          <a:lnRef idx="1">
-            <a:schemeClr val="accent1"/>
-          </a:lnRef>
-          <a:fillRef idx="0">
-            <a:schemeClr val="accent1"/>
-          </a:fillRef>
-          <a:effectRef idx="0">
-            <a:schemeClr val="accent1"/>
-          </a:effectRef>
-          <a:fontRef idx="minor">
-            <a:schemeClr val="tx1"/>
-          </a:fontRef>
-        </p:style>
-      </p:cxnSp>
-      <p:sp>
-        <p:nvSpPr>
-          <p:cNvPr id="14" name="TextBox 13">
-            <a:extLst>
-              <a:ext uri="{FF2B5EF4-FFF2-40B4-BE49-F238E27FC236}">
-                <a16:creationId xmlns:a16="http://schemas.microsoft.com/office/drawing/2014/main" id="{223D904C-12A8-6AAD-0844-1FA04B4A96D2}"/>
-              </a:ext>
-            </a:extLst>
-          </p:cNvPr>
-          <p:cNvSpPr txBox="1"/>
-          <p:nvPr/>
-        </p:nvSpPr>
-        <p:spPr>
-          <a:xfrm>
-            <a:off x="9452758" y="2642966"/>
-            <a:ext cx="300082" cy="369332"/>
-          </a:xfrm>
-          <a:prstGeom prst="rect">
-            <a:avLst/>
-          </a:prstGeom>
-          <a:noFill/>
-        </p:spPr>
-        <p:txBody>
-          <a:bodyPr wrap="none" rtlCol="0">
-            <a:spAutoFit/>
-          </a:bodyPr>
-          <a:lstStyle/>
-          <a:p>
-            <a:r>
-              <a:rPr lang="en-US" dirty="0"/>
-              <a:t>+</a:t>
-            </a:r>
-          </a:p>
-        </p:txBody>
-      </p:sp>
-      <p:sp>
-        <p:nvSpPr>
-          <p:cNvPr id="15" name="TextBox 14">
-            <a:extLst>
-              <a:ext uri="{FF2B5EF4-FFF2-40B4-BE49-F238E27FC236}">
-                <a16:creationId xmlns:a16="http://schemas.microsoft.com/office/drawing/2014/main" id="{9E60FFD4-A71A-236B-AB0E-A5F494399D47}"/>
-              </a:ext>
-            </a:extLst>
-          </p:cNvPr>
-          <p:cNvSpPr txBox="1"/>
-          <p:nvPr/>
-        </p:nvSpPr>
-        <p:spPr>
-          <a:xfrm>
-            <a:off x="9452758" y="3495432"/>
-            <a:ext cx="300082" cy="369332"/>
-          </a:xfrm>
-          <a:prstGeom prst="rect">
-            <a:avLst/>
-          </a:prstGeom>
-          <a:noFill/>
-        </p:spPr>
-        <p:txBody>
-          <a:bodyPr wrap="none" rtlCol="0">
-            <a:spAutoFit/>
-          </a:bodyPr>
-          <a:lstStyle/>
-          <a:p>
-            <a:r>
-              <a:rPr lang="en-US" dirty="0"/>
-              <a:t>+</a:t>
-            </a:r>
-          </a:p>
-        </p:txBody>
-      </p:sp>
-      <p:sp>
-        <p:nvSpPr>
-          <p:cNvPr id="16" name="TextBox 15">
-            <a:extLst>
-              <a:ext uri="{FF2B5EF4-FFF2-40B4-BE49-F238E27FC236}">
-                <a16:creationId xmlns:a16="http://schemas.microsoft.com/office/drawing/2014/main" id="{5CA98AA3-2DBE-E0B3-436F-AD1D8DE90EF4}"/>
-              </a:ext>
-            </a:extLst>
-          </p:cNvPr>
-          <p:cNvSpPr txBox="1"/>
-          <p:nvPr/>
-        </p:nvSpPr>
-        <p:spPr>
-          <a:xfrm>
-            <a:off x="9452758" y="4353978"/>
-            <a:ext cx="300082" cy="369332"/>
-          </a:xfrm>
-          <a:prstGeom prst="rect">
-            <a:avLst/>
-          </a:prstGeom>
-          <a:noFill/>
-        </p:spPr>
-        <p:txBody>
-          <a:bodyPr wrap="none" rtlCol="0">
-            <a:spAutoFit/>
-          </a:bodyPr>
-          <a:lstStyle/>
-          <a:p>
-            <a:r>
-              <a:rPr lang="en-US" dirty="0"/>
-              <a:t>+</a:t>
-            </a:r>
-          </a:p>
-        </p:txBody>
-      </p:sp>
-      <p:sp>
-        <p:nvSpPr>
-          <p:cNvPr id="9" name="AutoShape 2">
-            <a:extLst>
-              <a:ext uri="{FF2B5EF4-FFF2-40B4-BE49-F238E27FC236}">
-                <a16:creationId xmlns:a16="http://schemas.microsoft.com/office/drawing/2014/main" id="{1700FC29-B285-DEF0-791D-67EBA729D75C}"/>
-              </a:ext>
-            </a:extLst>
-          </p:cNvPr>
-          <p:cNvSpPr>
-            <a:spLocks noChangeAspect="1" noChangeArrowheads="1"/>
-          </p:cNvSpPr>
-          <p:nvPr/>
-        </p:nvSpPr>
-        <p:spPr bwMode="auto">
-          <a:xfrm>
-            <a:off x="5943600" y="3276600"/>
-            <a:ext cx="304800" cy="304800"/>
-          </a:xfrm>
-          <a:prstGeom prst="rect">
-            <a:avLst/>
-          </a:prstGeom>
-          <a:noFill/>
-          <a:extLst>
-            <a:ext uri="{909E8E84-426E-40DD-AFC4-6F175D3DCCD1}">
-              <a14:hiddenFill xmlns:a14="http://schemas.microsoft.com/office/drawing/2010/main">
-                <a:solidFill>
-                  <a:srgbClr val="FFFFFF"/>
-                </a:solidFill>
-              </a14:hiddenFill>
-            </a:ext>
-          </a:extLst>
-        </p:spPr>
-        <p:txBody>
-          <a:bodyPr vert="horz" wrap="square" lIns="91440" tIns="45720" rIns="91440" bIns="45720" numCol="1" anchor="t" anchorCtr="0" compatLnSpc="1">
-            <a:prstTxWarp prst="textNoShape">
-              <a:avLst/>
-            </a:prstTxWarp>
-          </a:bodyPr>
-          <a:lstStyle/>
-          <a:p>
-            <a:endParaRPr lang="en-US"/>
-          </a:p>
-        </p:txBody>
-      </p:sp>
-      <p:sp>
-        <p:nvSpPr>
-          <p:cNvPr id="21" name="Rectangle 20">
-            <a:extLst>
-              <a:ext uri="{FF2B5EF4-FFF2-40B4-BE49-F238E27FC236}">
-                <a16:creationId xmlns:a16="http://schemas.microsoft.com/office/drawing/2014/main" id="{287D80E1-8589-F3CE-0190-2052E2056D25}"/>
-              </a:ext>
-            </a:extLst>
-          </p:cNvPr>
-          <p:cNvSpPr/>
-          <p:nvPr/>
-        </p:nvSpPr>
-        <p:spPr>
-          <a:xfrm>
-            <a:off x="6416842" y="5397900"/>
-            <a:ext cx="224589" cy="240632"/>
-          </a:xfrm>
-          <a:prstGeom prst="rect">
-            <a:avLst/>
-          </a:prstGeom>
-          <a:solidFill>
-            <a:schemeClr val="bg1"/>
-          </a:solidFill>
-          <a:ln>
-            <a:solidFill>
-              <a:schemeClr val="bg1"/>
-            </a:solidFill>
-          </a:ln>
-        </p:spPr>
-        <p:style>
-          <a:lnRef idx="2">
-            <a:schemeClr val="accent1">
-              <a:shade val="15000"/>
-            </a:schemeClr>
-          </a:lnRef>
-          <a:fillRef idx="1">
-            <a:schemeClr val="accent1"/>
-          </a:fillRef>
-          <a:effectRef idx="0">
-            <a:schemeClr val="accent1"/>
-          </a:effectRef>
-          <a:fontRef idx="minor">
-            <a:schemeClr val="lt1"/>
-          </a:fontRef>
-        </p:style>
-        <p:txBody>
-          <a:bodyPr rtlCol="0" anchor="ctr"/>
-          <a:lstStyle/>
-          <a:p>
-            <a:pPr algn="ctr"/>
-            <a:endParaRPr lang="en-US"/>
+              <a:t>) with any questions whatsoever</a:t>
+            </a:r>
           </a:p>
         </p:txBody>
       </p:sp>
     </p:spTree>
     <p:extLst>
       <p:ext uri="{BB962C8B-B14F-4D97-AF65-F5344CB8AC3E}">
-        <p14:creationId xmlns:p14="http://schemas.microsoft.com/office/powerpoint/2010/main" val="3265763811"/>
+        <p14:creationId xmlns:p14="http://schemas.microsoft.com/office/powerpoint/2010/main" val="283632033"/>
       </p:ext>
     </p:extLst>
   </p:cSld>
@@ -5617,7 +5091,125 @@
 </file>
 
 <file path=ppt/slides/slide5.xml><?xml version="1.0" encoding="utf-8"?>
-<p:sld xmlns:a="http://schemas.openxmlformats.org/drawingml/2006/main" xmlns:r="http://schemas.openxmlformats.org/officeDocument/2006/relationships" xmlns:p="http://schemas.openxmlformats.org/presentationml/2006/main">
+<p:sld xmlns:a="http://schemas.openxmlformats.org/drawingml/2006/main" xmlns:r="http://schemas.openxmlformats.org/officeDocument/2006/relationships" xmlns:p="http://schemas.openxmlformats.org/presentationml/2006/main" show="0">
+  <p:cSld>
+    <p:spTree>
+      <p:nvGrpSpPr>
+        <p:cNvPr id="1" name=""/>
+        <p:cNvGrpSpPr/>
+        <p:nvPr/>
+      </p:nvGrpSpPr>
+      <p:grpSpPr>
+        <a:xfrm>
+          <a:off x="0" y="0"/>
+          <a:ext cx="0" cy="0"/>
+          <a:chOff x="0" y="0"/>
+          <a:chExt cx="0" cy="0"/>
+        </a:xfrm>
+      </p:grpSpPr>
+      <p:sp>
+        <p:nvSpPr>
+          <p:cNvPr id="2" name="Title 1">
+            <a:extLst>
+              <a:ext uri="{FF2B5EF4-FFF2-40B4-BE49-F238E27FC236}">
+                <a16:creationId xmlns:a16="http://schemas.microsoft.com/office/drawing/2014/main" id="{5A8BAFC2-7D74-5414-7C2F-DC1294C6B7F5}"/>
+              </a:ext>
+            </a:extLst>
+          </p:cNvPr>
+          <p:cNvSpPr>
+            <a:spLocks noGrp="1"/>
+          </p:cNvSpPr>
+          <p:nvPr>
+            <p:ph type="title"/>
+          </p:nvPr>
+        </p:nvSpPr>
+        <p:spPr/>
+        <p:txBody>
+          <a:bodyPr/>
+          <a:lstStyle/>
+          <a:p>
+            <a:r>
+              <a:rPr lang="en-US" dirty="0"/>
+              <a:t>Supplemental</a:t>
+            </a:r>
+          </a:p>
+        </p:txBody>
+      </p:sp>
+      <p:sp>
+        <p:nvSpPr>
+          <p:cNvPr id="3" name="Content Placeholder 2">
+            <a:extLst>
+              <a:ext uri="{FF2B5EF4-FFF2-40B4-BE49-F238E27FC236}">
+                <a16:creationId xmlns:a16="http://schemas.microsoft.com/office/drawing/2014/main" id="{F84D4047-2EC6-6DCD-FFAC-074BD26C0452}"/>
+              </a:ext>
+            </a:extLst>
+          </p:cNvPr>
+          <p:cNvSpPr>
+            <a:spLocks noGrp="1"/>
+          </p:cNvSpPr>
+          <p:nvPr>
+            <p:ph idx="1"/>
+          </p:nvPr>
+        </p:nvSpPr>
+        <p:spPr>
+          <a:xfrm>
+            <a:off x="549965" y="1275314"/>
+            <a:ext cx="11092070" cy="4914691"/>
+          </a:xfrm>
+        </p:spPr>
+        <p:txBody>
+          <a:bodyPr/>
+          <a:lstStyle/>
+          <a:p>
+            <a:endParaRPr lang="en-US"/>
+          </a:p>
+        </p:txBody>
+      </p:sp>
+      <p:sp>
+        <p:nvSpPr>
+          <p:cNvPr id="4" name="Slide Number Placeholder 3">
+            <a:extLst>
+              <a:ext uri="{FF2B5EF4-FFF2-40B4-BE49-F238E27FC236}">
+                <a16:creationId xmlns:a16="http://schemas.microsoft.com/office/drawing/2014/main" id="{9A1A1B60-620F-C625-24E7-556723D5C324}"/>
+              </a:ext>
+            </a:extLst>
+          </p:cNvPr>
+          <p:cNvSpPr>
+            <a:spLocks noGrp="1"/>
+          </p:cNvSpPr>
+          <p:nvPr>
+            <p:ph type="sldNum" sz="quarter" idx="12"/>
+          </p:nvPr>
+        </p:nvSpPr>
+        <p:spPr/>
+        <p:txBody>
+          <a:bodyPr/>
+          <a:lstStyle/>
+          <a:p>
+            <a:fld id="{7FCC63C6-BC1E-CC49-9701-9DA8C2A99AE0}" type="slidenum">
+              <a:rPr lang="en-US" smtClean="0"/>
+              <a:pPr/>
+              <a:t>5</a:t>
+            </a:fld>
+            <a:endParaRPr lang="en-US" dirty="0"/>
+          </a:p>
+        </p:txBody>
+      </p:sp>
+    </p:spTree>
+    <p:extLst>
+      <p:ext uri="{BB962C8B-B14F-4D97-AF65-F5344CB8AC3E}">
+        <p14:creationId xmlns:p14="http://schemas.microsoft.com/office/powerpoint/2010/main" val="2325941699"/>
+      </p:ext>
+    </p:extLst>
+  </p:cSld>
+  <p:clrMapOvr>
+    <a:masterClrMapping/>
+  </p:clrMapOvr>
+</p:sld>
+</file>
+
+<file path=ppt/slides/slide6.xml><?xml version="1.0" encoding="utf-8"?>
+<p:sld xmlns:a="http://schemas.openxmlformats.org/drawingml/2006/main" xmlns:r="http://schemas.openxmlformats.org/officeDocument/2006/relationships" xmlns:p="http://schemas.openxmlformats.org/presentationml/2006/main" show="0">
   <p:cSld>
     <p:spTree>
       <p:nvGrpSpPr>
@@ -5694,7 +5286,7 @@
             <a:fld id="{7FCC63C6-BC1E-CC49-9701-9DA8C2A99AE0}" type="slidenum">
               <a:rPr lang="en-US" smtClean="0"/>
               <a:pPr/>
-              <a:t>5</a:t>
+              <a:t>6</a:t>
             </a:fld>
             <a:endParaRPr lang="en-US" dirty="0"/>
           </a:p>
@@ -6498,140 +6090,6 @@
     <p:extLst>
       <p:ext uri="{BB962C8B-B14F-4D97-AF65-F5344CB8AC3E}">
         <p14:creationId xmlns:p14="http://schemas.microsoft.com/office/powerpoint/2010/main" val="831944503"/>
-      </p:ext>
-    </p:extLst>
-  </p:cSld>
-  <p:clrMapOvr>
-    <a:masterClrMapping/>
-  </p:clrMapOvr>
-</p:sld>
-</file>
-
-<file path=ppt/slides/slide6.xml><?xml version="1.0" encoding="utf-8"?>
-<p:sld xmlns:a="http://schemas.openxmlformats.org/drawingml/2006/main" xmlns:r="http://schemas.openxmlformats.org/officeDocument/2006/relationships" xmlns:p="http://schemas.openxmlformats.org/presentationml/2006/main">
-  <p:cSld>
-    <p:spTree>
-      <p:nvGrpSpPr>
-        <p:cNvPr id="1" name=""/>
-        <p:cNvGrpSpPr/>
-        <p:nvPr/>
-      </p:nvGrpSpPr>
-      <p:grpSpPr>
-        <a:xfrm>
-          <a:off x="0" y="0"/>
-          <a:ext cx="0" cy="0"/>
-          <a:chOff x="0" y="0"/>
-          <a:chExt cx="0" cy="0"/>
-        </a:xfrm>
-      </p:grpSpPr>
-      <p:sp>
-        <p:nvSpPr>
-          <p:cNvPr id="2" name="Title 1">
-            <a:extLst>
-              <a:ext uri="{FF2B5EF4-FFF2-40B4-BE49-F238E27FC236}">
-                <a16:creationId xmlns:a16="http://schemas.microsoft.com/office/drawing/2014/main" id="{3FC46504-5137-B067-E21E-59D03DC37E4A}"/>
-              </a:ext>
-            </a:extLst>
-          </p:cNvPr>
-          <p:cNvSpPr>
-            <a:spLocks noGrp="1"/>
-          </p:cNvSpPr>
-          <p:nvPr>
-            <p:ph type="title"/>
-          </p:nvPr>
-        </p:nvSpPr>
-        <p:spPr/>
-        <p:txBody>
-          <a:bodyPr/>
-          <a:lstStyle/>
-          <a:p>
-            <a:r>
-              <a:rPr lang="en-US" dirty="0"/>
-              <a:t>Thank you!</a:t>
-            </a:r>
-          </a:p>
-        </p:txBody>
-      </p:sp>
-      <p:sp>
-        <p:nvSpPr>
-          <p:cNvPr id="4" name="Slide Number Placeholder 3">
-            <a:extLst>
-              <a:ext uri="{FF2B5EF4-FFF2-40B4-BE49-F238E27FC236}">
-                <a16:creationId xmlns:a16="http://schemas.microsoft.com/office/drawing/2014/main" id="{56134A54-0490-0284-919F-D80B58105D4F}"/>
-              </a:ext>
-            </a:extLst>
-          </p:cNvPr>
-          <p:cNvSpPr>
-            <a:spLocks noGrp="1"/>
-          </p:cNvSpPr>
-          <p:nvPr>
-            <p:ph type="sldNum" sz="quarter" idx="12"/>
-          </p:nvPr>
-        </p:nvSpPr>
-        <p:spPr/>
-        <p:txBody>
-          <a:bodyPr/>
-          <a:lstStyle/>
-          <a:p>
-            <a:fld id="{7FCC63C6-BC1E-CC49-9701-9DA8C2A99AE0}" type="slidenum">
-              <a:rPr lang="en-US" smtClean="0"/>
-              <a:pPr/>
-              <a:t>6</a:t>
-            </a:fld>
-            <a:endParaRPr lang="en-US" dirty="0"/>
-          </a:p>
-        </p:txBody>
-      </p:sp>
-      <p:sp>
-        <p:nvSpPr>
-          <p:cNvPr id="3" name="Content Placeholder 2">
-            <a:extLst>
-              <a:ext uri="{FF2B5EF4-FFF2-40B4-BE49-F238E27FC236}">
-                <a16:creationId xmlns:a16="http://schemas.microsoft.com/office/drawing/2014/main" id="{C6670613-4E7D-228E-78BA-82B655751146}"/>
-              </a:ext>
-            </a:extLst>
-          </p:cNvPr>
-          <p:cNvSpPr>
-            <a:spLocks noGrp="1"/>
-          </p:cNvSpPr>
-          <p:nvPr>
-            <p:ph idx="1"/>
-          </p:nvPr>
-        </p:nvSpPr>
-        <p:spPr>
-          <a:xfrm>
-            <a:off x="384156" y="1258380"/>
-            <a:ext cx="11257877" cy="4914691"/>
-          </a:xfrm>
-        </p:spPr>
-        <p:txBody>
-          <a:bodyPr/>
-          <a:lstStyle/>
-          <a:p>
-            <a:pPr marL="0" indent="0" algn="ctr">
-              <a:buNone/>
-            </a:pPr>
-            <a:r>
-              <a:rPr lang="en-US" dirty="0"/>
-              <a:t>Please visit </a:t>
-            </a:r>
-            <a:r>
-              <a:rPr lang="en-US" dirty="0">
-                <a:hlinkClick r:id="rId2"/>
-              </a:rPr>
-              <a:t>https://gofigr.io</a:t>
-            </a:r>
-            <a:r>
-              <a:rPr lang="en-US" dirty="0"/>
-              <a:t> for example figures and demo videos</a:t>
-            </a:r>
-          </a:p>
-        </p:txBody>
-      </p:sp>
-    </p:spTree>
-    <p:extLst>
-      <p:ext uri="{BB962C8B-B14F-4D97-AF65-F5344CB8AC3E}">
-        <p14:creationId xmlns:p14="http://schemas.microsoft.com/office/powerpoint/2010/main" val="283632033"/>
       </p:ext>
     </p:extLst>
   </p:cSld>

--- a/webinar_2026_04_08/GoFigr Webinar - April 8, 2026.pptx
+++ b/webinar_2026_04_08/GoFigr Webinar - April 8, 2026.pptx
@@ -4655,8 +4655,12 @@
           </a:p>
           <a:p>
             <a:r>
+              <a:rPr lang="en-US" b="1" dirty="0"/>
+              <a:t>Stories:</a:t>
+            </a:r>
+            <a:r>
               <a:rPr lang="en-US" dirty="0"/>
-              <a:t>Combine R &amp; Python into an AI-generated slide deck with full provenance</a:t>
+              <a:t> turn figures into an AI-generated slide deck with full provenance</a:t>
             </a:r>
           </a:p>
           <a:p>
@@ -4722,7 +4726,7 @@
         </p:nvSpPr>
         <p:spPr>
           <a:xfrm>
-            <a:off x="6826975" y="1436180"/>
+            <a:off x="6878782" y="1532659"/>
             <a:ext cx="4763255" cy="3792682"/>
           </a:xfrm>
           <a:prstGeom prst="roundRect">
@@ -5067,7 +5071,11 @@
               <a:t>Feel free to email me (</a:t>
             </a:r>
             <a:r>
-              <a:rPr lang="en-US" dirty="0" err="1"/>
+              <a:rPr lang="en-US" dirty="0" err="1">
+                <a:solidFill>
+                  <a:schemeClr val="accent4"/>
+                </a:solidFill>
+              </a:rPr>
               <a:t>maciej@gofigr.io</a:t>
             </a:r>
             <a:r>
